--- a/decks/Entre Amis - core brand story - DRAFT.pptx
+++ b/decks/Entre Amis - core brand story - DRAFT.pptx
@@ -121,12 +121,12 @@
   <p:extLst>
     <p:ext uri="{521415D9-36F7-43E2-AB2F-B90AF26B5E84}">
       <p14:sectionLst xmlns:p14="http://schemas.microsoft.com/office/powerpoint/2010/main">
-        <p14:section name="Introduction" id="{f63eab41-143d-59d7-3341-6c1c4bd049e9}">
+        <p14:section name="Introduction" id="{d81daebf-a435-ca6f-9308-80124c575ce4}">
           <p14:sldIdLst>
             <p14:sldId id="256"/>
           </p14:sldIdLst>
         </p14:section>
-        <p14:section name="The brand" id="{92f85f2d-e4b8-ecde-e01f-a6cc86c15255}">
+        <p14:section name="The brand" id="{ebf8077d-2faa-305c-9c82-48e6b1a2f0b1}">
           <p14:sldIdLst>
             <p14:sldId id="257"/>
             <p14:sldId id="258"/>
@@ -134,7 +134,7 @@
             <p14:sldId id="260"/>
           </p14:sldIdLst>
         </p14:section>
-        <p14:section name="What we're building" id="{d59f5213-64ce-64cc-cad9-a37f737a5e38}">
+        <p14:section name="What we're building" id="{5e3328f8-5497-46af-ccaa-0c78b8fb8fa2}">
           <p14:sldIdLst>
             <p14:sldId id="261"/>
             <p14:sldId id="262"/>
@@ -142,20 +142,20 @@
             <p14:sldId id="264"/>
           </p14:sldIdLst>
         </p14:section>
-        <p14:section name="About us" id="{8c83e646-f30d-6c54-aae9-fa4da0b30b82}">
+        <p14:section name="About us" id="{b279c7bc-57e7-d92f-91e1-3594f9fdcf30}">
           <p14:sldIdLst>
             <p14:sldId id="265"/>
             <p14:sldId id="266"/>
           </p14:sldIdLst>
         </p14:section>
-        <p14:section name="Close" id="{b24a0b33-d2a7-e8aa-25dd-99b18eb5727d}">
+        <p14:section name="Close" id="{2520edc1-5a63-6fc3-d931-ea0c1e7889ef}">
           <p14:sldIdLst>
             <p14:sldId id="267"/>
             <p14:sldId id="268"/>
             <p14:sldId id="269"/>
           </p14:sldIdLst>
         </p14:section>
-        <p14:section name="Working notes — delete before sharing" id="{c94944e3-ed9a-c94a-a2be-279ed5a11ada}">
+        <p14:section name="Working notes — delete before sharing" id="{07d4b9db-b974-5f97-28e8-3dc2e8e5ea86}">
           <p14:sldIdLst>
             <p14:sldId id="270"/>
           </p14:sldIdLst>
@@ -1798,7 +1798,7 @@
           <a:p>
             <a:r>
               <a:rPr lang="en-US" dirty="0"/>
-              <a:t>'Useful insight' is renamed because 'insight' as a product is internal language. Contact sharing (proposed, needs legal review) is not mentioned here; it belongs in the partner decks once confirmed. 'Make wines more memorable' is reworded to avoid a benefit claim.</a:t>
+              <a:t>Heading and supporting line swapped so the slide says who it is for first. Body reworded (founder, 11 October): we help capture what people say and think, and help them remember. 'Useful insight' is renamed because 'insight' as a product is internal language. Contact sharing (proposed, needs legal review) is not mentioned here; it belongs in the partner decks once confirmed. 'Make wines more memorable' is reworded to avoid a benefit claim.</a:t>
             </a:r>
             <a:endParaRPr lang="en-US" dirty="0"/>
           </a:p>
@@ -1997,7 +1997,7 @@
         <p:spPr>
           <a:xfrm>
             <a:off x="548640" y="411480"/>
-            <a:ext cx="9326880" cy="685800"/>
+            <a:ext cx="8138160" cy="685800"/>
           </a:xfrm>
           <a:prstGeom prst="rect">
             <a:avLst/>
@@ -2720,7 +2720,7 @@
         <p:spPr>
           <a:xfrm>
             <a:off x="548640" y="411480"/>
-            <a:ext cx="9326880" cy="685800"/>
+            <a:ext cx="8138160" cy="685800"/>
           </a:xfrm>
           <a:prstGeom prst="rect">
             <a:avLst/>
@@ -3529,7 +3529,7 @@
         <p:spPr>
           <a:xfrm>
             <a:off x="548640" y="411480"/>
-            <a:ext cx="9326880" cy="685800"/>
+            <a:ext cx="8138160" cy="685800"/>
           </a:xfrm>
           <a:prstGeom prst="rect">
             <a:avLst/>
@@ -4044,7 +4044,7 @@
         <p:spPr>
           <a:xfrm>
             <a:off x="548640" y="411480"/>
-            <a:ext cx="9326880" cy="685800"/>
+            <a:ext cx="8138160" cy="685800"/>
           </a:xfrm>
           <a:prstGeom prst="rect">
             <a:avLst/>
@@ -4689,7 +4689,7 @@
         <p:spPr>
           <a:xfrm>
             <a:off x="548640" y="411480"/>
-            <a:ext cx="9326880" cy="685800"/>
+            <a:ext cx="8138160" cy="685800"/>
           </a:xfrm>
           <a:prstGeom prst="rect">
             <a:avLst/>
@@ -4762,7 +4762,50 @@
       </p:sp>
       <p:sp>
         <p:nvSpPr>
-          <p:cNvPr id="4" name="Stays statement"/>
+          <p:cNvPr id="4" name="Expression marker: ENTRE AMIS STAYS"/>
+          <p:cNvSpPr txBox="1"/>
+          <p:nvPr/>
+        </p:nvSpPr>
+        <p:spPr>
+          <a:xfrm>
+            <a:off x="8716975" y="457200"/>
+            <a:ext cx="2926080" cy="384048"/>
+          </a:xfrm>
+          <a:prstGeom prst="roundRect">
+            <a:avLst>
+              <a:gd name="adj" fmla="val 50000"/>
+            </a:avLst>
+          </a:prstGeom>
+          <a:solidFill>
+            <a:schemeClr val="accent3"/>
+          </a:solidFill>
+          <a:ln/>
+        </p:spPr>
+        <p:txBody>
+          <a:bodyPr wrap="square" lIns="0" tIns="0" rIns="0" bIns="0" rtlCol="0" anchor="ctr"/>
+          <a:lstStyle/>
+          <a:p>
+            <a:pPr algn="ctr" indent="0" marL="0">
+              <a:buNone/>
+            </a:pPr>
+            <a:r>
+              <a:rPr lang="en-US" sz="1400" spc="150" kern="0" dirty="0">
+                <a:solidFill>
+                  <a:schemeClr val="tx1"/>
+                </a:solidFill>
+                <a:latin typeface="Raleway SemiBold" pitchFamily="34" charset="0"/>
+                <a:ea typeface="Raleway SemiBold" pitchFamily="34" charset="-122"/>
+                <a:cs typeface="Raleway SemiBold" pitchFamily="34" charset="-120"/>
+              </a:rPr>
+              <a:t>ENTRE AMIS STAYS</a:t>
+            </a:r>
+            <a:endParaRPr lang="en-US" sz="1400" dirty="0"/>
+          </a:p>
+        </p:txBody>
+      </p:sp>
+      <p:sp>
+        <p:nvSpPr>
+          <p:cNvPr id="5" name="Stays statement"/>
           <p:cNvSpPr/>
           <p:nvPr/>
         </p:nvSpPr>
@@ -4789,7 +4832,7 @@
       </p:sp>
       <p:sp>
         <p:nvSpPr>
-          <p:cNvPr id="5" name="Text 3"/>
+          <p:cNvPr id="6" name="Text 4"/>
           <p:cNvSpPr txBox="1"/>
           <p:nvPr/>
         </p:nvSpPr>
@@ -4862,7 +4905,7 @@
       </p:sp>
       <p:sp>
         <p:nvSpPr>
-          <p:cNvPr id="6" name="Stays details"/>
+          <p:cNvPr id="7" name="Stays details"/>
           <p:cNvSpPr/>
           <p:nvPr/>
         </p:nvSpPr>
@@ -4896,7 +4939,7 @@
       </p:sp>
       <p:sp>
         <p:nvSpPr>
-          <p:cNvPr id="7" name="Text 5"/>
+          <p:cNvPr id="8" name="Text 6"/>
           <p:cNvSpPr txBox="1"/>
           <p:nvPr/>
         </p:nvSpPr>
@@ -5026,7 +5069,7 @@
       </p:sp>
       <p:sp>
         <p:nvSpPr>
-          <p:cNvPr id="8" name="Text 6"/>
+          <p:cNvPr id="9" name="Text 7"/>
           <p:cNvSpPr txBox="1"/>
           <p:nvPr/>
         </p:nvSpPr>
@@ -5065,7 +5108,7 @@
       </p:sp>
       <p:sp>
         <p:nvSpPr>
-          <p:cNvPr id="9" name="FLAG — delete before sharing"/>
+          <p:cNvPr id="10" name="FLAG — delete before sharing"/>
           <p:cNvSpPr txBox="1"/>
           <p:nvPr/>
         </p:nvSpPr>
@@ -5347,7 +5390,7 @@
         <p:spPr>
           <a:xfrm>
             <a:off x="548640" y="411480"/>
-            <a:ext cx="9326880" cy="685800"/>
+            <a:ext cx="8138160" cy="685800"/>
           </a:xfrm>
           <a:prstGeom prst="rect">
             <a:avLst/>
@@ -5904,7 +5947,7 @@
         <p:spPr>
           <a:xfrm>
             <a:off x="548640" y="411480"/>
-            <a:ext cx="9326880" cy="685800"/>
+            <a:ext cx="8138160" cy="685800"/>
           </a:xfrm>
           <a:prstGeom prst="rect">
             <a:avLst/>
@@ -6655,7 +6698,7 @@
         <p:spPr>
           <a:xfrm>
             <a:off x="548640" y="411480"/>
-            <a:ext cx="9326880" cy="685800"/>
+            <a:ext cx="8138160" cy="685800"/>
           </a:xfrm>
           <a:prstGeom prst="rect">
             <a:avLst/>
@@ -7206,7 +7249,7 @@
         <p:spPr>
           <a:xfrm>
             <a:off x="548640" y="411480"/>
-            <a:ext cx="9326880" cy="685800"/>
+            <a:ext cx="8138160" cy="685800"/>
           </a:xfrm>
           <a:prstGeom prst="rect">
             <a:avLst/>
@@ -7766,7 +7809,7 @@
         <p:spPr>
           <a:xfrm>
             <a:off x="548640" y="411480"/>
-            <a:ext cx="9326880" cy="685800"/>
+            <a:ext cx="8138160" cy="685800"/>
           </a:xfrm>
           <a:prstGeom prst="rect">
             <a:avLst/>
@@ -8555,7 +8598,7 @@
         <p:spPr>
           <a:xfrm>
             <a:off x="548640" y="411480"/>
-            <a:ext cx="9326880" cy="685800"/>
+            <a:ext cx="8138160" cy="685800"/>
           </a:xfrm>
           <a:prstGeom prst="rect">
             <a:avLst/>
@@ -8953,35 +8996,36 @@
       </p:sp>
       <p:sp>
         <p:nvSpPr>
-          <p:cNvPr id="13" name="Text 11"/>
+          <p:cNvPr id="13" name="Expression marker: THE GAME"/>
           <p:cNvSpPr txBox="1"/>
           <p:nvPr/>
         </p:nvSpPr>
         <p:spPr>
           <a:xfrm>
             <a:off x="777240" y="2743200"/>
-            <a:ext cx="2110664" cy="2011680"/>
-          </a:xfrm>
-          <a:prstGeom prst="rect">
-            <a:avLst/>
-          </a:prstGeom>
-          <a:noFill/>
+            <a:ext cx="2110664" cy="384048"/>
+          </a:xfrm>
+          <a:prstGeom prst="roundRect">
+            <a:avLst>
+              <a:gd name="adj" fmla="val 50000"/>
+            </a:avLst>
+          </a:prstGeom>
+          <a:solidFill>
+            <a:schemeClr val="tx1"/>
+          </a:solidFill>
           <a:ln/>
         </p:spPr>
         <p:txBody>
-          <a:bodyPr wrap="square" lIns="0" tIns="0" rIns="0" bIns="0" rtlCol="0" anchor="t"/>
-          <a:lstStyle/>
-          <a:p>
-            <a:pPr indent="0" marL="0">
-              <a:spcAft>
-                <a:spcPts val="400"/>
-              </a:spcAft>
-              <a:buNone/>
-            </a:pPr>
-            <a:r>
-              <a:rPr lang="en-US" sz="1200" spc="150" kern="0" dirty="0">
-                <a:solidFill>
-                  <a:schemeClr val="tx1"/>
+          <a:bodyPr wrap="square" lIns="0" tIns="0" rIns="0" bIns="0" rtlCol="0" anchor="ctr"/>
+          <a:lstStyle/>
+          <a:p>
+            <a:pPr algn="ctr" indent="0" marL="0">
+              <a:buNone/>
+            </a:pPr>
+            <a:r>
+              <a:rPr lang="en-US" sz="1400" spc="150" kern="0" dirty="0">
+                <a:solidFill>
+                  <a:schemeClr val="bg2"/>
                 </a:solidFill>
                 <a:latin typeface="Raleway SemiBold" pitchFamily="34" charset="0"/>
                 <a:ea typeface="Raleway SemiBold" pitchFamily="34" charset="-122"/>
@@ -8991,6 +9035,28 @@
             </a:r>
             <a:endParaRPr lang="en-US" sz="1400" dirty="0"/>
           </a:p>
+        </p:txBody>
+      </p:sp>
+      <p:sp>
+        <p:nvSpPr>
+          <p:cNvPr id="14" name="Text 12"/>
+          <p:cNvSpPr txBox="1"/>
+          <p:nvPr/>
+        </p:nvSpPr>
+        <p:spPr>
+          <a:xfrm>
+            <a:off x="777240" y="3291840"/>
+            <a:ext cx="2110664" cy="1463040"/>
+          </a:xfrm>
+          <a:prstGeom prst="rect">
+            <a:avLst/>
+          </a:prstGeom>
+          <a:noFill/>
+          <a:ln/>
+        </p:spPr>
+        <p:txBody>
+          <a:bodyPr wrap="square" lIns="0" tIns="0" rIns="0" bIns="0" rtlCol="0" anchor="t"/>
+          <a:lstStyle/>
           <a:p>
             <a:pPr indent="0" marL="0">
               <a:spcAft>
@@ -8999,37 +9065,20 @@
               <a:buNone/>
             </a:pPr>
             <a:r>
-              <a:rPr lang="en-US" sz="600" dirty="0">
-                <a:solidFill>
-                  <a:schemeClr val="tx1"/>
-                </a:solidFill>
-              </a:rPr>
-              <a:t> </a:t>
+              <a:rPr lang="en-US" sz="1400" dirty="0">
+                <a:solidFill>
+                  <a:schemeClr val="tx1"/>
+                </a:solidFill>
+              </a:rPr>
+              <a:t>A premium, giftable table game that turns any wine into conversation.</a:t>
             </a:r>
             <a:endParaRPr lang="en-US" sz="1400" dirty="0"/>
           </a:p>
-          <a:p>
-            <a:pPr indent="0" marL="0">
-              <a:spcAft>
-                <a:spcPts val="400"/>
-              </a:spcAft>
-              <a:buNone/>
-            </a:pPr>
-            <a:r>
-              <a:rPr lang="en-US" sz="1400" dirty="0">
-                <a:solidFill>
-                  <a:schemeClr val="tx1"/>
-                </a:solidFill>
-              </a:rPr>
-              <a:t>A premium, giftable table game that turns any wine into conversation.</a:t>
-            </a:r>
-            <a:endParaRPr lang="en-US" sz="1400" dirty="0"/>
-          </a:p>
-        </p:txBody>
-      </p:sp>
-      <p:sp>
-        <p:nvSpPr>
-          <p:cNvPr id="14" name="Stage tag"/>
+        </p:txBody>
+      </p:sp>
+      <p:sp>
+        <p:nvSpPr>
+          <p:cNvPr id="15" name="Stage tag"/>
           <p:cNvSpPr txBox="1"/>
           <p:nvPr/>
         </p:nvSpPr>
@@ -9044,9 +9093,13 @@
             </a:avLst>
           </a:prstGeom>
           <a:solidFill>
-            <a:schemeClr val="accent4"/>
+            <a:schemeClr val="bg2"/>
           </a:solidFill>
-          <a:ln/>
+          <a:ln w="12700">
+            <a:solidFill>
+              <a:schemeClr val="tx1"/>
+            </a:solidFill>
+          </a:ln>
         </p:spPr>
         <p:txBody>
           <a:bodyPr wrap="square" lIns="0" tIns="0" rIns="0" bIns="0" rtlCol="0" anchor="ctr"/>
@@ -9072,7 +9125,7 @@
       </p:sp>
       <p:sp>
         <p:nvSpPr>
-          <p:cNvPr id="15" name="Offer: THE APP"/>
+          <p:cNvPr id="16" name="Offer: THE APP"/>
           <p:cNvSpPr/>
           <p:nvPr/>
         </p:nvSpPr>
@@ -9106,35 +9159,36 @@
       </p:sp>
       <p:sp>
         <p:nvSpPr>
-          <p:cNvPr id="16" name="Text 14"/>
+          <p:cNvPr id="17" name="Expression marker: THE APP"/>
           <p:cNvSpPr txBox="1"/>
           <p:nvPr/>
         </p:nvSpPr>
         <p:spPr>
           <a:xfrm>
             <a:off x="3619424" y="2743200"/>
-            <a:ext cx="2110664" cy="2011680"/>
-          </a:xfrm>
-          <a:prstGeom prst="rect">
-            <a:avLst/>
-          </a:prstGeom>
-          <a:noFill/>
+            <a:ext cx="2110664" cy="384048"/>
+          </a:xfrm>
+          <a:prstGeom prst="roundRect">
+            <a:avLst>
+              <a:gd name="adj" fmla="val 50000"/>
+            </a:avLst>
+          </a:prstGeom>
+          <a:solidFill>
+            <a:schemeClr val="accent2"/>
+          </a:solidFill>
           <a:ln/>
         </p:spPr>
         <p:txBody>
-          <a:bodyPr wrap="square" lIns="0" tIns="0" rIns="0" bIns="0" rtlCol="0" anchor="t"/>
-          <a:lstStyle/>
-          <a:p>
-            <a:pPr indent="0" marL="0">
-              <a:spcAft>
-                <a:spcPts val="400"/>
-              </a:spcAft>
-              <a:buNone/>
-            </a:pPr>
-            <a:r>
-              <a:rPr lang="en-US" sz="1200" spc="150" kern="0" dirty="0">
-                <a:solidFill>
-                  <a:schemeClr val="tx1"/>
+          <a:bodyPr wrap="square" lIns="0" tIns="0" rIns="0" bIns="0" rtlCol="0" anchor="ctr"/>
+          <a:lstStyle/>
+          <a:p>
+            <a:pPr algn="ctr" indent="0" marL="0">
+              <a:buNone/>
+            </a:pPr>
+            <a:r>
+              <a:rPr lang="en-US" sz="1400" spc="150" kern="0" dirty="0">
+                <a:solidFill>
+                  <a:schemeClr val="bg1"/>
                 </a:solidFill>
                 <a:latin typeface="Raleway SemiBold" pitchFamily="34" charset="0"/>
                 <a:ea typeface="Raleway SemiBold" pitchFamily="34" charset="-122"/>
@@ -9144,6 +9198,28 @@
             </a:r>
             <a:endParaRPr lang="en-US" sz="1400" dirty="0"/>
           </a:p>
+        </p:txBody>
+      </p:sp>
+      <p:sp>
+        <p:nvSpPr>
+          <p:cNvPr id="18" name="Text 16"/>
+          <p:cNvSpPr txBox="1"/>
+          <p:nvPr/>
+        </p:nvSpPr>
+        <p:spPr>
+          <a:xfrm>
+            <a:off x="3619424" y="3291840"/>
+            <a:ext cx="2110664" cy="1463040"/>
+          </a:xfrm>
+          <a:prstGeom prst="rect">
+            <a:avLst/>
+          </a:prstGeom>
+          <a:noFill/>
+          <a:ln/>
+        </p:spPr>
+        <p:txBody>
+          <a:bodyPr wrap="square" lIns="0" tIns="0" rIns="0" bIns="0" rtlCol="0" anchor="t"/>
+          <a:lstStyle/>
           <a:p>
             <a:pPr indent="0" marL="0">
               <a:spcAft>
@@ -9152,37 +9228,20 @@
               <a:buNone/>
             </a:pPr>
             <a:r>
-              <a:rPr lang="en-US" sz="600" dirty="0">
-                <a:solidFill>
-                  <a:schemeClr val="tx1"/>
-                </a:solidFill>
-              </a:rPr>
-              <a:t> </a:t>
+              <a:rPr lang="en-US" sz="1400" dirty="0">
+                <a:solidFill>
+                  <a:schemeClr val="tx1"/>
+                </a:solidFill>
+              </a:rPr>
+              <a:t>Hosts the game, adds plain-English wine information when curiosity appears, and keeps the wines and moments people want to remember.</a:t>
             </a:r>
             <a:endParaRPr lang="en-US" sz="1400" dirty="0"/>
           </a:p>
-          <a:p>
-            <a:pPr indent="0" marL="0">
-              <a:spcAft>
-                <a:spcPts val="400"/>
-              </a:spcAft>
-              <a:buNone/>
-            </a:pPr>
-            <a:r>
-              <a:rPr lang="en-US" sz="1400" dirty="0">
-                <a:solidFill>
-                  <a:schemeClr val="tx1"/>
-                </a:solidFill>
-              </a:rPr>
-              <a:t>Hosts the game, adds plain-English wine information when curiosity appears, and keeps the wines and moments people want to remember.</a:t>
-            </a:r>
-            <a:endParaRPr lang="en-US" sz="1400" dirty="0"/>
-          </a:p>
-        </p:txBody>
-      </p:sp>
-      <p:sp>
-        <p:nvSpPr>
-          <p:cNvPr id="17" name="Stage tag"/>
+        </p:txBody>
+      </p:sp>
+      <p:sp>
+        <p:nvSpPr>
+          <p:cNvPr id="19" name="Stage tag"/>
           <p:cNvSpPr txBox="1"/>
           <p:nvPr/>
         </p:nvSpPr>
@@ -9197,9 +9256,13 @@
             </a:avLst>
           </a:prstGeom>
           <a:solidFill>
-            <a:schemeClr val="accent4"/>
+            <a:schemeClr val="bg2"/>
           </a:solidFill>
-          <a:ln/>
+          <a:ln w="12700">
+            <a:solidFill>
+              <a:schemeClr val="tx1"/>
+            </a:solidFill>
+          </a:ln>
         </p:spPr>
         <p:txBody>
           <a:bodyPr wrap="square" lIns="0" tIns="0" rIns="0" bIns="0" rtlCol="0" anchor="ctr"/>
@@ -9225,7 +9288,7 @@
       </p:sp>
       <p:sp>
         <p:nvSpPr>
-          <p:cNvPr id="18" name="Offer: ENTRE AMIS STAYS"/>
+          <p:cNvPr id="20" name="Offer: ENTRE AMIS STAYS"/>
           <p:cNvSpPr/>
           <p:nvPr/>
         </p:nvSpPr>
@@ -9259,33 +9322,34 @@
       </p:sp>
       <p:sp>
         <p:nvSpPr>
-          <p:cNvPr id="19" name="Text 17"/>
+          <p:cNvPr id="21" name="Expression marker: ENTRE AMIS STAYS"/>
           <p:cNvSpPr txBox="1"/>
           <p:nvPr/>
         </p:nvSpPr>
         <p:spPr>
           <a:xfrm>
             <a:off x="6461608" y="2743200"/>
-            <a:ext cx="2110664" cy="2011680"/>
-          </a:xfrm>
-          <a:prstGeom prst="rect">
-            <a:avLst/>
-          </a:prstGeom>
-          <a:noFill/>
+            <a:ext cx="2110664" cy="384048"/>
+          </a:xfrm>
+          <a:prstGeom prst="roundRect">
+            <a:avLst>
+              <a:gd name="adj" fmla="val 50000"/>
+            </a:avLst>
+          </a:prstGeom>
+          <a:solidFill>
+            <a:schemeClr val="accent3"/>
+          </a:solidFill>
           <a:ln/>
         </p:spPr>
         <p:txBody>
-          <a:bodyPr wrap="square" lIns="0" tIns="0" rIns="0" bIns="0" rtlCol="0" anchor="t"/>
-          <a:lstStyle/>
-          <a:p>
-            <a:pPr indent="0" marL="0">
-              <a:spcAft>
-                <a:spcPts val="400"/>
-              </a:spcAft>
-              <a:buNone/>
-            </a:pPr>
-            <a:r>
-              <a:rPr lang="en-US" sz="1200" spc="150" kern="0" dirty="0">
+          <a:bodyPr wrap="square" lIns="0" tIns="0" rIns="0" bIns="0" rtlCol="0" anchor="ctr"/>
+          <a:lstStyle/>
+          <a:p>
+            <a:pPr algn="ctr" indent="0" marL="0">
+              <a:buNone/>
+            </a:pPr>
+            <a:r>
+              <a:rPr lang="en-US" sz="1400" spc="150" kern="0" dirty="0">
                 <a:solidFill>
                   <a:schemeClr val="tx1"/>
                 </a:solidFill>
@@ -9297,6 +9361,28 @@
             </a:r>
             <a:endParaRPr lang="en-US" sz="1400" dirty="0"/>
           </a:p>
+        </p:txBody>
+      </p:sp>
+      <p:sp>
+        <p:nvSpPr>
+          <p:cNvPr id="22" name="Text 20"/>
+          <p:cNvSpPr txBox="1"/>
+          <p:nvPr/>
+        </p:nvSpPr>
+        <p:spPr>
+          <a:xfrm>
+            <a:off x="6461608" y="3291840"/>
+            <a:ext cx="2110664" cy="1463040"/>
+          </a:xfrm>
+          <a:prstGeom prst="rect">
+            <a:avLst/>
+          </a:prstGeom>
+          <a:noFill/>
+          <a:ln/>
+        </p:spPr>
+        <p:txBody>
+          <a:bodyPr wrap="square" lIns="0" tIns="0" rIns="0" bIns="0" rtlCol="0" anchor="t"/>
+          <a:lstStyle/>
           <a:p>
             <a:pPr indent="0" marL="0">
               <a:spcAft>
@@ -9305,37 +9391,20 @@
               <a:buNone/>
             </a:pPr>
             <a:r>
-              <a:rPr lang="en-US" sz="600" dirty="0">
-                <a:solidFill>
-                  <a:schemeClr val="tx1"/>
-                </a:solidFill>
-              </a:rPr>
-              <a:t> </a:t>
+              <a:rPr lang="en-US" sz="1400" dirty="0">
+                <a:solidFill>
+                  <a:schemeClr val="tx1"/>
+                </a:solidFill>
+              </a:rPr>
+              <a:t>Entre Amis lived for a few days, rather than played for an evening.</a:t>
             </a:r>
             <a:endParaRPr lang="en-US" sz="1400" dirty="0"/>
           </a:p>
-          <a:p>
-            <a:pPr indent="0" marL="0">
-              <a:spcAft>
-                <a:spcPts val="400"/>
-              </a:spcAft>
-              <a:buNone/>
-            </a:pPr>
-            <a:r>
-              <a:rPr lang="en-US" sz="1400" dirty="0">
-                <a:solidFill>
-                  <a:schemeClr val="tx1"/>
-                </a:solidFill>
-              </a:rPr>
-              <a:t>Entre Amis lived for a few days, rather than played for an evening.</a:t>
-            </a:r>
-            <a:endParaRPr lang="en-US" sz="1400" dirty="0"/>
-          </a:p>
-        </p:txBody>
-      </p:sp>
-      <p:sp>
-        <p:nvSpPr>
-          <p:cNvPr id="20" name="Stage tag"/>
+        </p:txBody>
+      </p:sp>
+      <p:sp>
+        <p:nvSpPr>
+          <p:cNvPr id="23" name="Stage tag"/>
           <p:cNvSpPr txBox="1"/>
           <p:nvPr/>
         </p:nvSpPr>
@@ -9350,9 +9419,13 @@
             </a:avLst>
           </a:prstGeom>
           <a:solidFill>
-            <a:schemeClr val="accent4"/>
+            <a:schemeClr val="bg2"/>
           </a:solidFill>
-          <a:ln/>
+          <a:ln w="12700">
+            <a:solidFill>
+              <a:schemeClr val="tx1"/>
+            </a:solidFill>
+          </a:ln>
         </p:spPr>
         <p:txBody>
           <a:bodyPr wrap="square" lIns="0" tIns="0" rIns="0" bIns="0" rtlCol="0" anchor="ctr"/>
@@ -9378,7 +9451,7 @@
       </p:sp>
       <p:sp>
         <p:nvSpPr>
-          <p:cNvPr id="21" name="Offer: WITH PARTNERS"/>
+          <p:cNvPr id="24" name="Offer: WITH PARTNERS"/>
           <p:cNvSpPr/>
           <p:nvPr/>
         </p:nvSpPr>
@@ -9412,33 +9485,34 @@
       </p:sp>
       <p:sp>
         <p:nvSpPr>
-          <p:cNvPr id="22" name="Text 20"/>
+          <p:cNvPr id="25" name="Expression marker: WITH PARTNERS"/>
           <p:cNvSpPr txBox="1"/>
           <p:nvPr/>
         </p:nvSpPr>
         <p:spPr>
           <a:xfrm>
             <a:off x="9303791" y="2743200"/>
-            <a:ext cx="2110664" cy="2011680"/>
-          </a:xfrm>
-          <a:prstGeom prst="rect">
-            <a:avLst/>
-          </a:prstGeom>
-          <a:noFill/>
+            <a:ext cx="2110664" cy="384048"/>
+          </a:xfrm>
+          <a:prstGeom prst="roundRect">
+            <a:avLst>
+              <a:gd name="adj" fmla="val 50000"/>
+            </a:avLst>
+          </a:prstGeom>
+          <a:solidFill>
+            <a:schemeClr val="accent4"/>
+          </a:solidFill>
           <a:ln/>
         </p:spPr>
         <p:txBody>
-          <a:bodyPr wrap="square" lIns="0" tIns="0" rIns="0" bIns="0" rtlCol="0" anchor="t"/>
-          <a:lstStyle/>
-          <a:p>
-            <a:pPr indent="0" marL="0">
-              <a:spcAft>
-                <a:spcPts val="400"/>
-              </a:spcAft>
-              <a:buNone/>
-            </a:pPr>
-            <a:r>
-              <a:rPr lang="en-US" sz="1200" spc="150" kern="0" dirty="0">
+          <a:bodyPr wrap="square" lIns="0" tIns="0" rIns="0" bIns="0" rtlCol="0" anchor="ctr"/>
+          <a:lstStyle/>
+          <a:p>
+            <a:pPr algn="ctr" indent="0" marL="0">
+              <a:buNone/>
+            </a:pPr>
+            <a:r>
+              <a:rPr lang="en-US" sz="1400" spc="150" kern="0" dirty="0">
                 <a:solidFill>
                   <a:schemeClr val="tx1"/>
                 </a:solidFill>
@@ -9450,6 +9524,28 @@
             </a:r>
             <a:endParaRPr lang="en-US" sz="1400" dirty="0"/>
           </a:p>
+        </p:txBody>
+      </p:sp>
+      <p:sp>
+        <p:nvSpPr>
+          <p:cNvPr id="26" name="Text 24"/>
+          <p:cNvSpPr txBox="1"/>
+          <p:nvPr/>
+        </p:nvSpPr>
+        <p:spPr>
+          <a:xfrm>
+            <a:off x="9303791" y="3291840"/>
+            <a:ext cx="2110664" cy="1463040"/>
+          </a:xfrm>
+          <a:prstGeom prst="rect">
+            <a:avLst/>
+          </a:prstGeom>
+          <a:noFill/>
+          <a:ln/>
+        </p:spPr>
+        <p:txBody>
+          <a:bodyPr wrap="square" lIns="0" tIns="0" rIns="0" bIns="0" rtlCol="0" anchor="t"/>
+          <a:lstStyle/>
           <a:p>
             <a:pPr indent="0" marL="0">
               <a:spcAft>
@@ -9458,37 +9554,20 @@
               <a:buNone/>
             </a:pPr>
             <a:r>
-              <a:rPr lang="en-US" sz="600" dirty="0">
-                <a:solidFill>
-                  <a:schemeClr val="tx1"/>
-                </a:solidFill>
-              </a:rPr>
-              <a:t> </a:t>
+              <a:rPr lang="en-US" sz="1400" dirty="0">
+                <a:solidFill>
+                  <a:schemeClr val="tx1"/>
+                </a:solidFill>
+              </a:rPr>
+              <a:t>Partner Mode and Event Mode. Bringing the Entre Amis table to vineyards, retailers, wine clubs and wine events.</a:t>
             </a:r>
             <a:endParaRPr lang="en-US" sz="1400" dirty="0"/>
           </a:p>
-          <a:p>
-            <a:pPr indent="0" marL="0">
-              <a:spcAft>
-                <a:spcPts val="400"/>
-              </a:spcAft>
-              <a:buNone/>
-            </a:pPr>
-            <a:r>
-              <a:rPr lang="en-US" sz="1400" dirty="0">
-                <a:solidFill>
-                  <a:schemeClr val="tx1"/>
-                </a:solidFill>
-              </a:rPr>
-              <a:t>Partner Mode and Event Mode. Bringing the Entre Amis table to vineyards, retailers, wine clubs and wine events.</a:t>
-            </a:r>
-            <a:endParaRPr lang="en-US" sz="1400" dirty="0"/>
-          </a:p>
-        </p:txBody>
-      </p:sp>
-      <p:sp>
-        <p:nvSpPr>
-          <p:cNvPr id="23" name="Stage tag"/>
+        </p:txBody>
+      </p:sp>
+      <p:sp>
+        <p:nvSpPr>
+          <p:cNvPr id="27" name="Stage tag"/>
           <p:cNvSpPr txBox="1"/>
           <p:nvPr/>
         </p:nvSpPr>
@@ -9503,9 +9582,13 @@
             </a:avLst>
           </a:prstGeom>
           <a:solidFill>
-            <a:schemeClr val="accent4"/>
+            <a:schemeClr val="bg2"/>
           </a:solidFill>
-          <a:ln/>
+          <a:ln w="12700">
+            <a:solidFill>
+              <a:schemeClr val="tx1"/>
+            </a:solidFill>
+          </a:ln>
         </p:spPr>
         <p:txBody>
           <a:bodyPr wrap="square" lIns="0" tIns="0" rIns="0" bIns="0" rtlCol="0" anchor="ctr"/>
@@ -9531,7 +9614,7 @@
       </p:sp>
       <p:sp>
         <p:nvSpPr>
-          <p:cNvPr id="24" name="FLAG — delete before sharing"/>
+          <p:cNvPr id="28" name="FLAG — delete before sharing"/>
           <p:cNvSpPr txBox="1"/>
           <p:nvPr/>
         </p:nvSpPr>
@@ -9587,7 +9670,7 @@
       </p:sp>
       <p:sp>
         <p:nvSpPr>
-          <p:cNvPr id="25" name="FLAG — delete before sharing"/>
+          <p:cNvPr id="29" name="FLAG — delete before sharing"/>
           <p:cNvSpPr txBox="1"/>
           <p:nvPr/>
         </p:nvSpPr>
@@ -9725,7 +9808,7 @@
         <p:spPr>
           <a:xfrm>
             <a:off x="548640" y="411480"/>
-            <a:ext cx="9326880" cy="685800"/>
+            <a:ext cx="8138160" cy="685800"/>
           </a:xfrm>
           <a:prstGeom prst="rect">
             <a:avLst/>
@@ -9798,14 +9881,14 @@
       </p:sp>
       <p:sp>
         <p:nvSpPr>
-          <p:cNvPr id="4" name="Stage tag"/>
+          <p:cNvPr id="4" name="Expression marker: THE GAME"/>
           <p:cNvSpPr txBox="1"/>
           <p:nvPr/>
         </p:nvSpPr>
         <p:spPr>
           <a:xfrm>
-            <a:off x="9905695" y="502920"/>
-            <a:ext cx="1737360" cy="292608"/>
+            <a:off x="9265615" y="457200"/>
+            <a:ext cx="2377440" cy="384048"/>
           </a:xfrm>
           <a:prstGeom prst="roundRect">
             <a:avLst>
@@ -9813,7 +9896,7 @@
             </a:avLst>
           </a:prstGeom>
           <a:solidFill>
-            <a:schemeClr val="accent4"/>
+            <a:schemeClr val="tx1"/>
           </a:solidFill>
           <a:ln/>
         </p:spPr>
@@ -9825,14 +9908,61 @@
               <a:buNone/>
             </a:pPr>
             <a:r>
-              <a:rPr lang="en-US" sz="1200" dirty="0">
-                <a:solidFill>
-                  <a:schemeClr val="tx1"/>
+              <a:rPr lang="en-US" sz="1400" spc="150" kern="0" dirty="0">
+                <a:solidFill>
+                  <a:schemeClr val="bg2"/>
                 </a:solidFill>
                 <a:latin typeface="Raleway SemiBold" pitchFamily="34" charset="0"/>
                 <a:ea typeface="Raleway SemiBold" pitchFamily="34" charset="-122"/>
                 <a:cs typeface="Raleway SemiBold" pitchFamily="34" charset="-120"/>
               </a:rPr>
+              <a:t>THE GAME</a:t>
+            </a:r>
+            <a:endParaRPr lang="en-US" sz="1400" dirty="0"/>
+          </a:p>
+        </p:txBody>
+      </p:sp>
+      <p:sp>
+        <p:nvSpPr>
+          <p:cNvPr id="5" name="Stage tag"/>
+          <p:cNvSpPr txBox="1"/>
+          <p:nvPr/>
+        </p:nvSpPr>
+        <p:spPr>
+          <a:xfrm>
+            <a:off x="9265615" y="914400"/>
+            <a:ext cx="2377440" cy="292608"/>
+          </a:xfrm>
+          <a:prstGeom prst="roundRect">
+            <a:avLst>
+              <a:gd name="adj" fmla="val 50000"/>
+            </a:avLst>
+          </a:prstGeom>
+          <a:solidFill>
+            <a:schemeClr val="bg2"/>
+          </a:solidFill>
+          <a:ln w="12700">
+            <a:solidFill>
+              <a:schemeClr val="tx1"/>
+            </a:solidFill>
+          </a:ln>
+        </p:spPr>
+        <p:txBody>
+          <a:bodyPr wrap="square" lIns="0" tIns="0" rIns="0" bIns="0" rtlCol="0" anchor="ctr"/>
+          <a:lstStyle/>
+          <a:p>
+            <a:pPr algn="ctr" indent="0" marL="0">
+              <a:buNone/>
+            </a:pPr>
+            <a:r>
+              <a:rPr lang="en-US" sz="1200" dirty="0">
+                <a:solidFill>
+                  <a:schemeClr val="tx1"/>
+                </a:solidFill>
+                <a:latin typeface="Raleway SemiBold" pitchFamily="34" charset="0"/>
+                <a:ea typeface="Raleway SemiBold" pitchFamily="34" charset="-122"/>
+                <a:cs typeface="Raleway SemiBold" pitchFamily="34" charset="-120"/>
+              </a:rPr>
               <a:t>In development</a:t>
             </a:r>
             <a:endParaRPr lang="en-US" sz="1200" dirty="0"/>
@@ -9841,7 +9971,7 @@
       </p:sp>
       <p:sp>
         <p:nvSpPr>
-          <p:cNvPr id="5" name="Image placeholder"/>
+          <p:cNvPr id="6" name="Image placeholder"/>
           <p:cNvSpPr/>
           <p:nvPr/>
         </p:nvSpPr>
@@ -9868,7 +9998,7 @@
       </p:sp>
       <p:sp>
         <p:nvSpPr>
-          <p:cNvPr id="6" name="Text 4"/>
+          <p:cNvPr id="7" name="Text 5"/>
           <p:cNvSpPr txBox="1"/>
           <p:nvPr/>
         </p:nvSpPr>
@@ -9910,7 +10040,7 @@
       </p:sp>
       <p:sp>
         <p:nvSpPr>
-          <p:cNvPr id="7" name="Text 5"/>
+          <p:cNvPr id="8" name="Text 6"/>
           <p:cNvSpPr txBox="1"/>
           <p:nvPr/>
         </p:nvSpPr>
@@ -9949,7 +10079,7 @@
       </p:sp>
       <p:sp>
         <p:nvSpPr>
-          <p:cNvPr id="8" name="Text 6"/>
+          <p:cNvPr id="9" name="Text 7"/>
           <p:cNvSpPr txBox="1"/>
           <p:nvPr/>
         </p:nvSpPr>
@@ -10002,7 +10132,7 @@
       </p:sp>
       <p:sp>
         <p:nvSpPr>
-          <p:cNvPr id="9" name="Family colour: Savour"/>
+          <p:cNvPr id="10" name="Family colour: Savour"/>
           <p:cNvSpPr/>
           <p:nvPr/>
         </p:nvSpPr>
@@ -10027,7 +10157,7 @@
       </p:sp>
       <p:sp>
         <p:nvSpPr>
-          <p:cNvPr id="10" name="Text 8"/>
+          <p:cNvPr id="11" name="Text 9"/>
           <p:cNvSpPr txBox="1"/>
           <p:nvPr/>
         </p:nvSpPr>
@@ -10083,7 +10213,7 @@
       </p:sp>
       <p:sp>
         <p:nvSpPr>
-          <p:cNvPr id="11" name="Family colour: Pour"/>
+          <p:cNvPr id="12" name="Family colour: Pour"/>
           <p:cNvSpPr/>
           <p:nvPr/>
         </p:nvSpPr>
@@ -10108,7 +10238,7 @@
       </p:sp>
       <p:sp>
         <p:nvSpPr>
-          <p:cNvPr id="12" name="Text 10"/>
+          <p:cNvPr id="13" name="Text 11"/>
           <p:cNvSpPr txBox="1"/>
           <p:nvPr/>
         </p:nvSpPr>
@@ -10164,7 +10294,7 @@
       </p:sp>
       <p:sp>
         <p:nvSpPr>
-          <p:cNvPr id="13" name="Family colour: Mischief"/>
+          <p:cNvPr id="14" name="Family colour: Mischief"/>
           <p:cNvSpPr/>
           <p:nvPr/>
         </p:nvSpPr>
@@ -10189,7 +10319,7 @@
       </p:sp>
       <p:sp>
         <p:nvSpPr>
-          <p:cNvPr id="14" name="Text 12"/>
+          <p:cNvPr id="15" name="Text 13"/>
           <p:cNvSpPr txBox="1"/>
           <p:nvPr/>
         </p:nvSpPr>
@@ -10245,7 +10375,7 @@
       </p:sp>
       <p:sp>
         <p:nvSpPr>
-          <p:cNvPr id="15" name="Family colour: Wild"/>
+          <p:cNvPr id="16" name="Family colour: Wild"/>
           <p:cNvSpPr/>
           <p:nvPr/>
         </p:nvSpPr>
@@ -10270,7 +10400,7 @@
       </p:sp>
       <p:sp>
         <p:nvSpPr>
-          <p:cNvPr id="16" name="Text 14"/>
+          <p:cNvPr id="17" name="Text 15"/>
           <p:cNvSpPr txBox="1"/>
           <p:nvPr/>
         </p:nvSpPr>
@@ -10326,7 +10456,7 @@
       </p:sp>
       <p:sp>
         <p:nvSpPr>
-          <p:cNvPr id="17" name="Family colour: Secret Missions"/>
+          <p:cNvPr id="18" name="Family colour: Secret Missions"/>
           <p:cNvSpPr/>
           <p:nvPr/>
         </p:nvSpPr>
@@ -10351,7 +10481,7 @@
       </p:sp>
       <p:sp>
         <p:nvSpPr>
-          <p:cNvPr id="18" name="Text 16"/>
+          <p:cNvPr id="19" name="Text 17"/>
           <p:cNvSpPr txBox="1"/>
           <p:nvPr/>
         </p:nvSpPr>
@@ -10407,7 +10537,7 @@
       </p:sp>
       <p:sp>
         <p:nvSpPr>
-          <p:cNvPr id="19" name="Text 17"/>
+          <p:cNvPr id="20" name="Text 18"/>
           <p:cNvSpPr txBox="1"/>
           <p:nvPr/>
         </p:nvSpPr>
@@ -10463,7 +10593,7 @@
       </p:sp>
       <p:sp>
         <p:nvSpPr>
-          <p:cNvPr id="20" name="Fact: 2–8 PLAYERS"/>
+          <p:cNvPr id="21" name="Fact: 2–8 PLAYERS"/>
           <p:cNvSpPr/>
           <p:nvPr/>
         </p:nvSpPr>
@@ -10497,7 +10627,7 @@
       </p:sp>
       <p:sp>
         <p:nvSpPr>
-          <p:cNvPr id="21" name="Text 19"/>
+          <p:cNvPr id="22" name="Text 20"/>
           <p:cNvSpPr txBox="1"/>
           <p:nvPr/>
         </p:nvSpPr>
@@ -10556,7 +10686,7 @@
       </p:sp>
       <p:sp>
         <p:nvSpPr>
-          <p:cNvPr id="22" name="Fact: ANY WINE"/>
+          <p:cNvPr id="23" name="Fact: ANY WINE"/>
           <p:cNvSpPr/>
           <p:nvPr/>
         </p:nvSpPr>
@@ -10590,7 +10720,7 @@
       </p:sp>
       <p:sp>
         <p:nvSpPr>
-          <p:cNvPr id="23" name="Text 21"/>
+          <p:cNvPr id="24" name="Text 22"/>
           <p:cNvSpPr txBox="1"/>
           <p:nvPr/>
         </p:nvSpPr>
@@ -10649,7 +10779,7 @@
       </p:sp>
       <p:sp>
         <p:nvSpPr>
-          <p:cNvPr id="24" name="Fact: ANY TIME OF DAY"/>
+          <p:cNvPr id="25" name="Fact: ANY TIME OF DAY"/>
           <p:cNvSpPr/>
           <p:nvPr/>
         </p:nvSpPr>
@@ -10683,7 +10813,7 @@
       </p:sp>
       <p:sp>
         <p:nvSpPr>
-          <p:cNvPr id="25" name="Text 23"/>
+          <p:cNvPr id="26" name="Text 24"/>
           <p:cNvSpPr txBox="1"/>
           <p:nvPr/>
         </p:nvSpPr>
@@ -10742,7 +10872,7 @@
       </p:sp>
       <p:sp>
         <p:nvSpPr>
-          <p:cNvPr id="26" name="Fact: NO APP NEEDED"/>
+          <p:cNvPr id="27" name="Fact: NO APP NEEDED"/>
           <p:cNvSpPr/>
           <p:nvPr/>
         </p:nvSpPr>
@@ -10776,7 +10906,7 @@
       </p:sp>
       <p:sp>
         <p:nvSpPr>
-          <p:cNvPr id="27" name="Text 25"/>
+          <p:cNvPr id="28" name="Text 26"/>
           <p:cNvSpPr txBox="1"/>
           <p:nvPr/>
         </p:nvSpPr>
@@ -10835,7 +10965,7 @@
       </p:sp>
       <p:sp>
         <p:nvSpPr>
-          <p:cNvPr id="28" name="Fact: 18+"/>
+          <p:cNvPr id="29" name="Fact: 18+"/>
           <p:cNvSpPr/>
           <p:nvPr/>
         </p:nvSpPr>
@@ -10869,7 +10999,7 @@
       </p:sp>
       <p:sp>
         <p:nvSpPr>
-          <p:cNvPr id="29" name="Text 27"/>
+          <p:cNvPr id="30" name="Text 28"/>
           <p:cNvSpPr txBox="1"/>
           <p:nvPr/>
         </p:nvSpPr>
@@ -10928,7 +11058,7 @@
       </p:sp>
       <p:sp>
         <p:nvSpPr>
-          <p:cNvPr id="30" name="FLAG — delete before sharing"/>
+          <p:cNvPr id="31" name="FLAG — delete before sharing"/>
           <p:cNvSpPr txBox="1"/>
           <p:nvPr/>
         </p:nvSpPr>
@@ -11066,7 +11196,7 @@
         <p:spPr>
           <a:xfrm>
             <a:off x="548640" y="411480"/>
-            <a:ext cx="9326880" cy="685800"/>
+            <a:ext cx="8138160" cy="685800"/>
           </a:xfrm>
           <a:prstGeom prst="rect">
             <a:avLst/>
@@ -11139,14 +11269,14 @@
       </p:sp>
       <p:sp>
         <p:nvSpPr>
-          <p:cNvPr id="4" name="Stage tag"/>
+          <p:cNvPr id="4" name="Expression marker: THE APP"/>
           <p:cNvSpPr txBox="1"/>
           <p:nvPr/>
         </p:nvSpPr>
         <p:spPr>
           <a:xfrm>
-            <a:off x="9905695" y="502920"/>
-            <a:ext cx="1737360" cy="292608"/>
+            <a:off x="9265615" y="457200"/>
+            <a:ext cx="2377440" cy="384048"/>
           </a:xfrm>
           <a:prstGeom prst="roundRect">
             <a:avLst>
@@ -11154,7 +11284,7 @@
             </a:avLst>
           </a:prstGeom>
           <a:solidFill>
-            <a:schemeClr val="accent4"/>
+            <a:schemeClr val="accent2"/>
           </a:solidFill>
           <a:ln/>
         </p:spPr>
@@ -11166,14 +11296,61 @@
               <a:buNone/>
             </a:pPr>
             <a:r>
-              <a:rPr lang="en-US" sz="1200" dirty="0">
-                <a:solidFill>
-                  <a:schemeClr val="tx1"/>
+              <a:rPr lang="en-US" sz="1400" spc="150" kern="0" dirty="0">
+                <a:solidFill>
+                  <a:schemeClr val="bg1"/>
                 </a:solidFill>
                 <a:latin typeface="Raleway SemiBold" pitchFamily="34" charset="0"/>
                 <a:ea typeface="Raleway SemiBold" pitchFamily="34" charset="-122"/>
                 <a:cs typeface="Raleway SemiBold" pitchFamily="34" charset="-120"/>
               </a:rPr>
+              <a:t>THE APP</a:t>
+            </a:r>
+            <a:endParaRPr lang="en-US" sz="1400" dirty="0"/>
+          </a:p>
+        </p:txBody>
+      </p:sp>
+      <p:sp>
+        <p:nvSpPr>
+          <p:cNvPr id="5" name="Stage tag"/>
+          <p:cNvSpPr txBox="1"/>
+          <p:nvPr/>
+        </p:nvSpPr>
+        <p:spPr>
+          <a:xfrm>
+            <a:off x="9265615" y="914400"/>
+            <a:ext cx="2377440" cy="292608"/>
+          </a:xfrm>
+          <a:prstGeom prst="roundRect">
+            <a:avLst>
+              <a:gd name="adj" fmla="val 50000"/>
+            </a:avLst>
+          </a:prstGeom>
+          <a:solidFill>
+            <a:schemeClr val="bg2"/>
+          </a:solidFill>
+          <a:ln w="12700">
+            <a:solidFill>
+              <a:schemeClr val="tx1"/>
+            </a:solidFill>
+          </a:ln>
+        </p:spPr>
+        <p:txBody>
+          <a:bodyPr wrap="square" lIns="0" tIns="0" rIns="0" bIns="0" rtlCol="0" anchor="ctr"/>
+          <a:lstStyle/>
+          <a:p>
+            <a:pPr algn="ctr" indent="0" marL="0">
+              <a:buNone/>
+            </a:pPr>
+            <a:r>
+              <a:rPr lang="en-US" sz="1200" dirty="0">
+                <a:solidFill>
+                  <a:schemeClr val="tx1"/>
+                </a:solidFill>
+                <a:latin typeface="Raleway SemiBold" pitchFamily="34" charset="0"/>
+                <a:ea typeface="Raleway SemiBold" pitchFamily="34" charset="-122"/>
+                <a:cs typeface="Raleway SemiBold" pitchFamily="34" charset="-120"/>
+              </a:rPr>
               <a:t>In development</a:t>
             </a:r>
             <a:endParaRPr lang="en-US" sz="1200" dirty="0"/>
@@ -11182,7 +11359,7 @@
       </p:sp>
       <p:sp>
         <p:nvSpPr>
-          <p:cNvPr id="5" name="App features"/>
+          <p:cNvPr id="6" name="App features"/>
           <p:cNvSpPr/>
           <p:nvPr/>
         </p:nvSpPr>
@@ -11216,7 +11393,7 @@
       </p:sp>
       <p:sp>
         <p:nvSpPr>
-          <p:cNvPr id="6" name="Text 4"/>
+          <p:cNvPr id="7" name="Text 5"/>
           <p:cNvSpPr txBox="1"/>
           <p:nvPr/>
         </p:nvSpPr>
@@ -11364,7 +11541,7 @@
       </p:sp>
       <p:sp>
         <p:nvSpPr>
-          <p:cNvPr id="7" name="Text 5"/>
+          <p:cNvPr id="8" name="Text 6"/>
           <p:cNvSpPr txBox="1"/>
           <p:nvPr/>
         </p:nvSpPr>
@@ -11406,7 +11583,7 @@
       </p:sp>
       <p:sp>
         <p:nvSpPr>
-          <p:cNvPr id="8" name="Image placeholder"/>
+          <p:cNvPr id="9" name="Image placeholder"/>
           <p:cNvSpPr/>
           <p:nvPr/>
         </p:nvSpPr>
@@ -11433,7 +11610,7 @@
       </p:sp>
       <p:sp>
         <p:nvSpPr>
-          <p:cNvPr id="9" name="Text 7"/>
+          <p:cNvPr id="10" name="Text 8"/>
           <p:cNvSpPr txBox="1"/>
           <p:nvPr/>
         </p:nvSpPr>
@@ -11475,7 +11652,7 @@
       </p:sp>
       <p:sp>
         <p:nvSpPr>
-          <p:cNvPr id="10" name="Image placeholder"/>
+          <p:cNvPr id="11" name="Image placeholder"/>
           <p:cNvSpPr/>
           <p:nvPr/>
         </p:nvSpPr>
@@ -11502,7 +11679,7 @@
       </p:sp>
       <p:sp>
         <p:nvSpPr>
-          <p:cNvPr id="11" name="Text 9"/>
+          <p:cNvPr id="12" name="Text 10"/>
           <p:cNvSpPr txBox="1"/>
           <p:nvPr/>
         </p:nvSpPr>
@@ -11626,7 +11803,7 @@
         <p:spPr>
           <a:xfrm>
             <a:off x="548640" y="411480"/>
-            <a:ext cx="9326880" cy="685800"/>
+            <a:ext cx="8138160" cy="685800"/>
           </a:xfrm>
           <a:prstGeom prst="rect">
             <a:avLst/>
@@ -11650,7 +11827,7 @@
                 <a:ea typeface="Raleway Light" pitchFamily="34" charset="-122"/>
                 <a:cs typeface="Raleway Light" pitchFamily="34" charset="-120"/>
               </a:rPr>
-              <a:t>What we add isn't content. It's connection.</a:t>
+              <a:t>For vineyards, retailers, wine clubs and wine events</a:t>
             </a:r>
             <a:endParaRPr lang="en-US" sz="3600" dirty="0"/>
           </a:p>
@@ -11659,15 +11836,13 @@
       <p:sp>
         <p:nvSpPr>
           <p:cNvPr id="3" name="Text 1"/>
-          <p:cNvSpPr/>
-          <p:nvPr>
-            <p:ph idx="103" type="body" hasCustomPrompt="1"/>
-          </p:nvPr>
-        </p:nvSpPr>
-        <p:spPr>
-          <a:xfrm>
-            <a:off x="548640" y="1115568"/>
-            <a:ext cx="11094415" cy="411480"/>
+          <p:cNvSpPr txBox="1"/>
+          <p:nvPr/>
+        </p:nvSpPr>
+        <p:spPr>
+          <a:xfrm>
+            <a:off x="548640" y="1536192"/>
+            <a:ext cx="11094415" cy="365760"/>
           </a:xfrm>
           <a:prstGeom prst="rect">
             <a:avLst/>
@@ -11679,7 +11854,10 @@
           <a:bodyPr wrap="square" lIns="0" tIns="0" rIns="0" bIns="0" rtlCol="0" anchor="t"/>
           <a:lstStyle/>
           <a:p>
-            <a:pPr algn="l" indent="0" marL="0">
+            <a:pPr indent="0" marL="0">
+              <a:spcAft>
+                <a:spcPts val="400"/>
+              </a:spcAft>
               <a:buNone/>
             </a:pPr>
             <a:r>
@@ -11687,11 +11865,8 @@
                 <a:solidFill>
                   <a:schemeClr val="tx1"/>
                 </a:solidFill>
-                <a:latin typeface="Raleway Light" pitchFamily="34" charset="0"/>
-                <a:ea typeface="Raleway Light" pitchFamily="34" charset="-122"/>
-                <a:cs typeface="Raleway Light" pitchFamily="34" charset="-120"/>
-              </a:rPr>
-              <a:t>For vineyards, retailers, wine clubs and wine events</a:t>
+              </a:rPr>
+              <a:t>What we add isn't content. It's connection.</a:t>
             </a:r>
             <a:endParaRPr lang="en-US" sz="1800" dirty="0"/>
           </a:p>
@@ -11699,14 +11874,57 @@
       </p:sp>
       <p:sp>
         <p:nvSpPr>
-          <p:cNvPr id="4" name="Text 2"/>
+          <p:cNvPr id="4" name="Expression marker: PARTNERS"/>
           <p:cNvSpPr txBox="1"/>
           <p:nvPr/>
         </p:nvSpPr>
         <p:spPr>
           <a:xfrm>
-            <a:off x="548640" y="1737360"/>
-            <a:ext cx="11094415" cy="640080"/>
+            <a:off x="9265615" y="457200"/>
+            <a:ext cx="2377440" cy="384048"/>
+          </a:xfrm>
+          <a:prstGeom prst="roundRect">
+            <a:avLst>
+              <a:gd name="adj" fmla="val 50000"/>
+            </a:avLst>
+          </a:prstGeom>
+          <a:solidFill>
+            <a:schemeClr val="accent4"/>
+          </a:solidFill>
+          <a:ln/>
+        </p:spPr>
+        <p:txBody>
+          <a:bodyPr wrap="square" lIns="0" tIns="0" rIns="0" bIns="0" rtlCol="0" anchor="ctr"/>
+          <a:lstStyle/>
+          <a:p>
+            <a:pPr algn="ctr" indent="0" marL="0">
+              <a:buNone/>
+            </a:pPr>
+            <a:r>
+              <a:rPr lang="en-US" sz="1400" spc="150" kern="0" dirty="0">
+                <a:solidFill>
+                  <a:schemeClr val="tx1"/>
+                </a:solidFill>
+                <a:latin typeface="Raleway SemiBold" pitchFamily="34" charset="0"/>
+                <a:ea typeface="Raleway SemiBold" pitchFamily="34" charset="-122"/>
+                <a:cs typeface="Raleway SemiBold" pitchFamily="34" charset="-120"/>
+              </a:rPr>
+              <a:t>PARTNERS</a:t>
+            </a:r>
+            <a:endParaRPr lang="en-US" sz="1400" dirty="0"/>
+          </a:p>
+        </p:txBody>
+      </p:sp>
+      <p:sp>
+        <p:nvSpPr>
+          <p:cNvPr id="5" name="Text 3"/>
+          <p:cNvSpPr txBox="1"/>
+          <p:nvPr/>
+        </p:nvSpPr>
+        <p:spPr>
+          <a:xfrm>
+            <a:off x="548640" y="1965960"/>
+            <a:ext cx="11094415" cy="594360"/>
           </a:xfrm>
           <a:prstGeom prst="rect">
             <a:avLst/>
@@ -11730,7 +11948,7 @@
                   <a:schemeClr val="tx1"/>
                 </a:solidFill>
               </a:rPr>
-              <a:t>Wine businesses already have stories, tasting notes and expertise. We add the social side: people talking about your wines, saying what they really think, and remembering them afterwards.</a:t>
+              <a:t>Wine businesses already have stories, tasting notes and expertise. We help capture what people say and really think about your wines, and help them remember those wines afterwards.</a:t>
             </a:r>
             <a:endParaRPr lang="en-US" sz="1600" dirty="0"/>
           </a:p>
@@ -11738,18 +11956,18 @@
       </p:sp>
       <p:sp>
         <p:nvSpPr>
-          <p:cNvPr id="5" name="Card: BETWEEN PEOPLE"/>
+          <p:cNvPr id="6" name="Card: BETWEEN PEOPLE"/>
           <p:cNvSpPr/>
           <p:nvPr/>
         </p:nvSpPr>
         <p:spPr>
           <a:xfrm>
-            <a:off x="548640" y="2514600"/>
-            <a:ext cx="2567864" cy="1691640"/>
+            <a:off x="548640" y="2606040"/>
+            <a:ext cx="2567864" cy="1783080"/>
           </a:xfrm>
           <a:prstGeom prst="roundRect">
             <a:avLst>
-              <a:gd name="adj" fmla="val 6486"/>
+              <a:gd name="adj" fmla="val 6154"/>
             </a:avLst>
           </a:prstGeom>
           <a:solidFill>
@@ -11772,14 +11990,14 @@
       </p:sp>
       <p:sp>
         <p:nvSpPr>
-          <p:cNvPr id="6" name="Text 4"/>
+          <p:cNvPr id="7" name="Text 5"/>
           <p:cNvSpPr txBox="1"/>
           <p:nvPr/>
         </p:nvSpPr>
         <p:spPr>
           <a:xfrm>
-            <a:off x="777240" y="2743200"/>
-            <a:ext cx="2110664" cy="1325880"/>
+            <a:off x="777240" y="2834640"/>
+            <a:ext cx="2110664" cy="1417320"/>
           </a:xfrm>
           <a:prstGeom prst="rect">
             <a:avLst/>
@@ -11848,18 +12066,18 @@
       </p:sp>
       <p:sp>
         <p:nvSpPr>
-          <p:cNvPr id="7" name="Card: WITH THE WINE"/>
+          <p:cNvPr id="8" name="Card: WITH THE WINE"/>
           <p:cNvSpPr/>
           <p:nvPr/>
         </p:nvSpPr>
         <p:spPr>
           <a:xfrm>
-            <a:off x="3390824" y="2514600"/>
-            <a:ext cx="2567864" cy="1691640"/>
+            <a:off x="3390824" y="2606040"/>
+            <a:ext cx="2567864" cy="1783080"/>
           </a:xfrm>
           <a:prstGeom prst="roundRect">
             <a:avLst>
-              <a:gd name="adj" fmla="val 6486"/>
+              <a:gd name="adj" fmla="val 6154"/>
             </a:avLst>
           </a:prstGeom>
           <a:solidFill>
@@ -11882,14 +12100,14 @@
       </p:sp>
       <p:sp>
         <p:nvSpPr>
-          <p:cNvPr id="8" name="Text 6"/>
+          <p:cNvPr id="9" name="Text 7"/>
           <p:cNvSpPr txBox="1"/>
           <p:nvPr/>
         </p:nvSpPr>
         <p:spPr>
           <a:xfrm>
-            <a:off x="3619424" y="2743200"/>
-            <a:ext cx="2110664" cy="1325880"/>
+            <a:off x="3619424" y="2834640"/>
+            <a:ext cx="2110664" cy="1417320"/>
           </a:xfrm>
           <a:prstGeom prst="rect">
             <a:avLst/>
@@ -11958,18 +12176,18 @@
       </p:sp>
       <p:sp>
         <p:nvSpPr>
-          <p:cNvPr id="9" name="Card: BEYOND THE MOMENT"/>
+          <p:cNvPr id="10" name="Card: BEYOND THE MOMENT"/>
           <p:cNvSpPr/>
           <p:nvPr/>
         </p:nvSpPr>
         <p:spPr>
           <a:xfrm>
-            <a:off x="6233008" y="2514600"/>
-            <a:ext cx="2567864" cy="1691640"/>
+            <a:off x="6233008" y="2606040"/>
+            <a:ext cx="2567864" cy="1783080"/>
           </a:xfrm>
           <a:prstGeom prst="roundRect">
             <a:avLst>
-              <a:gd name="adj" fmla="val 6486"/>
+              <a:gd name="adj" fmla="val 6154"/>
             </a:avLst>
           </a:prstGeom>
           <a:solidFill>
@@ -11992,14 +12210,14 @@
       </p:sp>
       <p:sp>
         <p:nvSpPr>
-          <p:cNvPr id="10" name="Text 8"/>
+          <p:cNvPr id="11" name="Text 9"/>
           <p:cNvSpPr txBox="1"/>
           <p:nvPr/>
         </p:nvSpPr>
         <p:spPr>
           <a:xfrm>
-            <a:off x="6461608" y="2743200"/>
-            <a:ext cx="2110664" cy="1325880"/>
+            <a:off x="6461608" y="2834640"/>
+            <a:ext cx="2110664" cy="1417320"/>
           </a:xfrm>
           <a:prstGeom prst="rect">
             <a:avLst/>
@@ -12068,18 +12286,18 @@
       </p:sp>
       <p:sp>
         <p:nvSpPr>
-          <p:cNvPr id="11" name="Card: WHAT PEOPLE REALLY THINK"/>
+          <p:cNvPr id="12" name="Card: WHAT PEOPLE REALLY THINK"/>
           <p:cNvSpPr/>
           <p:nvPr/>
         </p:nvSpPr>
         <p:spPr>
           <a:xfrm>
-            <a:off x="9075191" y="2514600"/>
-            <a:ext cx="2567864" cy="1691640"/>
+            <a:off x="9075191" y="2606040"/>
+            <a:ext cx="2567864" cy="1783080"/>
           </a:xfrm>
           <a:prstGeom prst="roundRect">
             <a:avLst>
-              <a:gd name="adj" fmla="val 6486"/>
+              <a:gd name="adj" fmla="val 6154"/>
             </a:avLst>
           </a:prstGeom>
           <a:solidFill>
@@ -12102,14 +12320,14 @@
       </p:sp>
       <p:sp>
         <p:nvSpPr>
-          <p:cNvPr id="12" name="Text 10"/>
+          <p:cNvPr id="13" name="Text 11"/>
           <p:cNvSpPr txBox="1"/>
           <p:nvPr/>
         </p:nvSpPr>
         <p:spPr>
           <a:xfrm>
-            <a:off x="9303791" y="2743200"/>
-            <a:ext cx="2110664" cy="1325880"/>
+            <a:off x="9303791" y="2834640"/>
+            <a:ext cx="2110664" cy="1417320"/>
           </a:xfrm>
           <a:prstGeom prst="rect">
             <a:avLst/>
@@ -12178,18 +12396,18 @@
       </p:sp>
       <p:sp>
         <p:nvSpPr>
-          <p:cNvPr id="13" name="Two ways in"/>
+          <p:cNvPr id="14" name="Two ways in"/>
           <p:cNvSpPr/>
           <p:nvPr/>
         </p:nvSpPr>
         <p:spPr>
           <a:xfrm>
-            <a:off x="548640" y="4434840"/>
-            <a:ext cx="7863840" cy="1417320"/>
+            <a:off x="548640" y="4572000"/>
+            <a:ext cx="7863840" cy="1325880"/>
           </a:xfrm>
           <a:prstGeom prst="roundRect">
             <a:avLst>
-              <a:gd name="adj" fmla="val 7742"/>
+              <a:gd name="adj" fmla="val 8276"/>
             </a:avLst>
           </a:prstGeom>
           <a:solidFill>
@@ -12205,14 +12423,14 @@
       </p:sp>
       <p:sp>
         <p:nvSpPr>
-          <p:cNvPr id="14" name="Text 12"/>
+          <p:cNvPr id="15" name="Text 13"/>
           <p:cNvSpPr txBox="1"/>
           <p:nvPr/>
         </p:nvSpPr>
         <p:spPr>
           <a:xfrm>
-            <a:off x="868680" y="4572000"/>
-            <a:ext cx="7315200" cy="1371600"/>
+            <a:off x="868680" y="4681728"/>
+            <a:ext cx="7315200" cy="1188720"/>
           </a:xfrm>
           <a:prstGeom prst="rect">
             <a:avLst/>
@@ -12349,14 +12567,14 @@
       </p:sp>
       <p:sp>
         <p:nvSpPr>
-          <p:cNvPr id="15" name="FLAG — delete before sharing"/>
+          <p:cNvPr id="16" name="FLAG — delete before sharing"/>
           <p:cNvSpPr txBox="1"/>
           <p:nvPr/>
         </p:nvSpPr>
         <p:spPr>
           <a:xfrm>
-            <a:off x="8686800" y="4434840"/>
-            <a:ext cx="2956255" cy="731520"/>
+            <a:off x="8686800" y="4572000"/>
+            <a:ext cx="2956255" cy="621792"/>
           </a:xfrm>
           <a:prstGeom prst="rect">
             <a:avLst/>
@@ -12405,14 +12623,14 @@
       </p:sp>
       <p:sp>
         <p:nvSpPr>
-          <p:cNvPr id="16" name="FLAG — delete before sharing"/>
+          <p:cNvPr id="17" name="FLAG — delete before sharing"/>
           <p:cNvSpPr txBox="1"/>
           <p:nvPr/>
         </p:nvSpPr>
         <p:spPr>
           <a:xfrm>
-            <a:off x="8686800" y="5303520"/>
-            <a:ext cx="2956255" cy="731520"/>
+            <a:off x="8686800" y="5257800"/>
+            <a:ext cx="2956255" cy="640080"/>
           </a:xfrm>
           <a:prstGeom prst="rect">
             <a:avLst/>
@@ -12456,6 +12674,36 @@
               <a:t>Event Mode's stage, and how it differs from Partner Mode.</a:t>
             </a:r>
             <a:endParaRPr lang="en-US" sz="1100" dirty="0"/>
+          </a:p>
+        </p:txBody>
+      </p:sp>
+      <p:sp>
+        <p:nvSpPr>
+          <p:cNvPr id="19" name="Text 1"/>
+          <p:cNvSpPr/>
+          <p:nvPr>
+            <p:ph idx="103" type="body" hasCustomPrompt="1"/>
+          </p:nvPr>
+        </p:nvSpPr>
+        <p:spPr>
+          <a:xfrm>
+            <a:off x="548640" y="1115568"/>
+            <a:ext cx="11094415" cy="411480"/>
+          </a:xfrm>
+          <a:prstGeom prst="rect">
+            <a:avLst/>
+          </a:prstGeom>
+          <a:noFill/>
+          <a:ln/>
+        </p:spPr>
+        <p:txBody>
+          <a:bodyPr wrap="square" lIns="0" tIns="0" rIns="0" bIns="0" rtlCol="0" anchor="t"/>
+          <a:lstStyle/>
+          <a:p>
+            <a:pPr algn="l" indent="0" marL="0">
+              <a:buNone/>
+            </a:pPr>
+            <a:endParaRPr lang="en-US" sz="1800" dirty="0"/>
           </a:p>
         </p:txBody>
       </p:sp>

--- a/decks/Entre Amis - core brand story - DRAFT.pptx
+++ b/decks/Entre Amis - core brand story - DRAFT.pptx
@@ -121,12 +121,12 @@
   <p:extLst>
     <p:ext uri="{521415D9-36F7-43E2-AB2F-B90AF26B5E84}">
       <p14:sectionLst xmlns:p14="http://schemas.microsoft.com/office/powerpoint/2010/main">
-        <p14:section name="Introduction" id="{d81daebf-a435-ca6f-9308-80124c575ce4}">
+        <p14:section name="Introduction" id="{12931764-2ed8-486e-f75a-28e79bccf512}">
           <p14:sldIdLst>
             <p14:sldId id="256"/>
           </p14:sldIdLst>
         </p14:section>
-        <p14:section name="The brand" id="{ebf8077d-2faa-305c-9c82-48e6b1a2f0b1}">
+        <p14:section name="The brand" id="{70cf33e2-3f8d-d5e0-5c63-a01212d6515f}">
           <p14:sldIdLst>
             <p14:sldId id="257"/>
             <p14:sldId id="258"/>
@@ -134,7 +134,7 @@
             <p14:sldId id="260"/>
           </p14:sldIdLst>
         </p14:section>
-        <p14:section name="What we're building" id="{5e3328f8-5497-46af-ccaa-0c78b8fb8fa2}">
+        <p14:section name="What we're building" id="{19308358-6c4c-1566-7c11-b1fd3829f638}">
           <p14:sldIdLst>
             <p14:sldId id="261"/>
             <p14:sldId id="262"/>
@@ -142,20 +142,20 @@
             <p14:sldId id="264"/>
           </p14:sldIdLst>
         </p14:section>
-        <p14:section name="About us" id="{b279c7bc-57e7-d92f-91e1-3594f9fdcf30}">
+        <p14:section name="About us" id="{8ca5ec52-16a0-9363-504c-59723a77f017}">
           <p14:sldIdLst>
             <p14:sldId id="265"/>
             <p14:sldId id="266"/>
           </p14:sldIdLst>
         </p14:section>
-        <p14:section name="Close" id="{2520edc1-5a63-6fc3-d931-ea0c1e7889ef}">
+        <p14:section name="Close" id="{3ddbe387-5798-6f58-3b9e-b52bc47e205e}">
           <p14:sldIdLst>
             <p14:sldId id="267"/>
             <p14:sldId id="268"/>
             <p14:sldId id="269"/>
           </p14:sldIdLst>
         </p14:section>
-        <p14:section name="Working notes — delete before sharing" id="{07d4b9db-b974-5f97-28e8-3dc2e8e5ea86}">
+        <p14:section name="Working notes — delete before sharing" id="{4c7828ba-ac89-e323-755c-8b7613ec687e}">
           <p14:sldIdLst>
             <p14:sldId id="270"/>
           </p14:sldIdLst>

--- a/decks/Entre Amis - core brand story - DRAFT.pptx
+++ b/decks/Entre Amis - core brand story - DRAFT.pptx
@@ -121,12 +121,12 @@
   <p:extLst>
     <p:ext uri="{521415D9-36F7-43E2-AB2F-B90AF26B5E84}">
       <p14:sectionLst xmlns:p14="http://schemas.microsoft.com/office/powerpoint/2010/main">
-        <p14:section name="Introduction" id="{12931764-2ed8-486e-f75a-28e79bccf512}">
+        <p14:section name="Introduction" id="{c3097012-aa5c-a7eb-39f5-91c82d98c9ca}">
           <p14:sldIdLst>
             <p14:sldId id="256"/>
           </p14:sldIdLst>
         </p14:section>
-        <p14:section name="The brand" id="{70cf33e2-3f8d-d5e0-5c63-a01212d6515f}">
+        <p14:section name="The brand" id="{3dc37a04-47c1-3847-31bb-db3683c86d99}">
           <p14:sldIdLst>
             <p14:sldId id="257"/>
             <p14:sldId id="258"/>
@@ -134,7 +134,7 @@
             <p14:sldId id="260"/>
           </p14:sldIdLst>
         </p14:section>
-        <p14:section name="What we're building" id="{19308358-6c4c-1566-7c11-b1fd3829f638}">
+        <p14:section name="What we're building" id="{b2cb11bb-9721-7b1d-2e0a-e0f721b1dc3d}">
           <p14:sldIdLst>
             <p14:sldId id="261"/>
             <p14:sldId id="262"/>
@@ -142,20 +142,20 @@
             <p14:sldId id="264"/>
           </p14:sldIdLst>
         </p14:section>
-        <p14:section name="About us" id="{8ca5ec52-16a0-9363-504c-59723a77f017}">
+        <p14:section name="About us" id="{49df7ad2-1192-239f-c029-6fd849f1da53}">
           <p14:sldIdLst>
             <p14:sldId id="265"/>
             <p14:sldId id="266"/>
           </p14:sldIdLst>
         </p14:section>
-        <p14:section name="Close" id="{3ddbe387-5798-6f58-3b9e-b52bc47e205e}">
+        <p14:section name="Close" id="{675e23ed-b2af-ec28-1d0a-9823da4ed827}">
           <p14:sldIdLst>
             <p14:sldId id="267"/>
             <p14:sldId id="268"/>
             <p14:sldId id="269"/>
           </p14:sldIdLst>
         </p14:section>
-        <p14:section name="Working notes — delete before sharing" id="{4c7828ba-ac89-e323-755c-8b7613ec687e}">
+        <p14:section name="Working notes — delete before sharing" id="{2c5f07bf-f239-8a2d-e0b9-02bbb21facbd}">
           <p14:sldIdLst>
             <p14:sldId id="270"/>
           </p14:sldIdLst>
@@ -1710,7 +1710,7 @@
           <a:p>
             <a:r>
               <a:rPr lang="en-US" dirty="0"/>
-              <a:t>Wine recognition is deliberately left out: it isn't claimable until it's built into the app. Add app screens.</a:t>
+              <a:t>Wine recognition is deliberately left out: it isn't claimable until it's built into the app. Wine 101 and My wines follow the founder's correction (12 October): Wine 101 is a directory of wine facts; My wines is the personal record. Add app screens.</a:t>
             </a:r>
             <a:endParaRPr lang="en-US" dirty="0"/>
           </a:p>
@@ -5602,7 +5602,7 @@
                   <a:schemeClr val="tx1"/>
                 </a:solidFill>
               </a:rPr>
-              <a:t>Journey, Partner Mode and Event Mode, observations rule: confirm in the Brand Brain</a:t>
+              <a:t>Journey, Partner Mode and Event Mode, observations rule, Wine 101 and My wines: confirm in the Brand Brain</a:t>
             </a:r>
             <a:endParaRPr lang="en-US" sz="1500" dirty="0"/>
           </a:p>
@@ -11399,8 +11399,8 @@
         </p:nvSpPr>
         <p:spPr>
           <a:xfrm>
-            <a:off x="868680" y="2057400"/>
-            <a:ext cx="5394960" cy="3291840"/>
+            <a:off x="868680" y="2011680"/>
+            <a:ext cx="5394960" cy="3429000"/>
           </a:xfrm>
           <a:prstGeom prst="rect">
             <a:avLst/>
@@ -11414,7 +11414,7 @@
           <a:p>
             <a:pPr marL="203200" indent="-203200">
               <a:spcAft>
-                <a:spcPts val="1000"/>
+                <a:spcPts val="700"/>
               </a:spcAft>
               <a:buSzPct val="100000"/>
               <a:buChar char="•"/>
@@ -11432,7 +11432,7 @@
           <a:p>
             <a:pPr marL="203200" indent="-203200">
               <a:spcAft>
-                <a:spcPts val="1000"/>
+                <a:spcPts val="700"/>
               </a:spcAft>
               <a:buSzPct val="100000"/>
               <a:buChar char="•"/>
@@ -11450,7 +11450,7 @@
           <a:p>
             <a:pPr marL="203200" indent="-203200">
               <a:spcAft>
-                <a:spcPts val="1000"/>
+                <a:spcPts val="700"/>
               </a:spcAft>
               <a:buSzPct val="100000"/>
               <a:buChar char="•"/>
@@ -11461,14 +11461,14 @@
                   <a:schemeClr val="tx1"/>
                 </a:solidFill>
               </a:rPr>
-              <a:t>Plain-English hints and descriptions, when curiosity appears.</a:t>
+              <a:t>Plain-English hints when curiosity appears.</a:t>
             </a:r>
             <a:endParaRPr lang="en-US" sz="1600" dirty="0"/>
           </a:p>
           <a:p>
             <a:pPr marL="203200" indent="-203200">
               <a:spcAft>
-                <a:spcPts val="1000"/>
+                <a:spcPts val="700"/>
               </a:spcAft>
               <a:buSzPct val="100000"/>
               <a:buChar char="•"/>
@@ -11486,7 +11486,7 @@
           <a:p>
             <a:pPr marL="203200" indent="-203200">
               <a:spcAft>
-                <a:spcPts val="1000"/>
+                <a:spcPts val="700"/>
               </a:spcAft>
               <a:buSzPct val="100000"/>
               <a:buChar char="•"/>
@@ -11497,14 +11497,14 @@
                   <a:schemeClr val="tx1"/>
                 </a:solidFill>
               </a:rPr>
-              <a:t>Wine 101: a personal library of wines and moments.</a:t>
+              <a:t>Wine 101: wine facts and help, like a directory.</a:t>
             </a:r>
             <a:endParaRPr lang="en-US" sz="1600" dirty="0"/>
           </a:p>
           <a:p>
             <a:pPr marL="203200" indent="-203200">
               <a:spcAft>
-                <a:spcPts val="1000"/>
+                <a:spcPts val="700"/>
               </a:spcAft>
               <a:buSzPct val="100000"/>
               <a:buChar char="•"/>
@@ -11515,14 +11515,14 @@
                   <a:schemeClr val="tx1"/>
                 </a:solidFill>
               </a:rPr>
-              <a:t>Optional Word Play and Wine Knowledge levels.</a:t>
+              <a:t>My wines: your tastings, favourites, events and experiences.</a:t>
             </a:r>
             <a:endParaRPr lang="en-US" sz="1600" dirty="0"/>
           </a:p>
           <a:p>
             <a:pPr marL="203200" indent="-203200">
               <a:spcAft>
-                <a:spcPts val="1000"/>
+                <a:spcPts val="700"/>
               </a:spcAft>
               <a:buSzPct val="100000"/>
               <a:buChar char="•"/>
@@ -11533,7 +11533,25 @@
                   <a:schemeClr val="tx1"/>
                 </a:solidFill>
               </a:rPr>
-              <a:t>Hosts can also use it for their own tasting and exploration.</a:t>
+              <a:t>Optional Word Play and Wine Knowledge levels.</a:t>
+            </a:r>
+            <a:endParaRPr lang="en-US" sz="1600" dirty="0"/>
+          </a:p>
+          <a:p>
+            <a:pPr marL="203200" indent="-203200">
+              <a:spcAft>
+                <a:spcPts val="700"/>
+              </a:spcAft>
+              <a:buSzPct val="100000"/>
+              <a:buChar char="•"/>
+            </a:pPr>
+            <a:r>
+              <a:rPr lang="en-US" sz="1600" dirty="0">
+                <a:solidFill>
+                  <a:schemeClr val="tx1"/>
+                </a:solidFill>
+              </a:rPr>
+              <a:t>Hosts can also use it for their own tasting.</a:t>
             </a:r>
             <a:endParaRPr lang="en-US" sz="1600" dirty="0"/>
           </a:p>
@@ -11590,7 +11608,7 @@
         <p:spPr>
           <a:xfrm>
             <a:off x="6903720" y="1783080"/>
-            <a:ext cx="2232508" cy="4251960"/>
+            <a:ext cx="2232508" cy="3520440"/>
           </a:xfrm>
           <a:prstGeom prst="roundRect">
             <a:avLst>
@@ -11617,7 +11635,7 @@
         <p:spPr>
           <a:xfrm>
             <a:off x="7178040" y="1783080"/>
-            <a:ext cx="1683868" cy="4251960"/>
+            <a:ext cx="1683868" cy="3520440"/>
           </a:xfrm>
           <a:prstGeom prst="rect">
             <a:avLst/>
@@ -11659,7 +11677,7 @@
         <p:spPr>
           <a:xfrm>
             <a:off x="9410548" y="1783080"/>
-            <a:ext cx="2232508" cy="4251960"/>
+            <a:ext cx="2232508" cy="3520440"/>
           </a:xfrm>
           <a:prstGeom prst="roundRect">
             <a:avLst>
@@ -11686,7 +11704,7 @@
         <p:spPr>
           <a:xfrm>
             <a:off x="9684868" y="1783080"/>
-            <a:ext cx="1683868" cy="4251960"/>
+            <a:ext cx="1683868" cy="3520440"/>
           </a:xfrm>
           <a:prstGeom prst="rect">
             <a:avLst/>
@@ -11716,6 +11734,62 @@
               <a:t>App screen — to add</a:t>
             </a:r>
             <a:endParaRPr lang="en-US" sz="1400" dirty="0"/>
+          </a:p>
+        </p:txBody>
+      </p:sp>
+      <p:sp>
+        <p:nvSpPr>
+          <p:cNvPr id="13" name="FLAG — delete before sharing"/>
+          <p:cNvSpPr txBox="1"/>
+          <p:nvPr/>
+        </p:nvSpPr>
+        <p:spPr>
+          <a:xfrm>
+            <a:off x="6903720" y="5440680"/>
+            <a:ext cx="4739335" cy="594360"/>
+          </a:xfrm>
+          <a:prstGeom prst="rect">
+            <a:avLst/>
+          </a:prstGeom>
+          <a:solidFill>
+            <a:schemeClr val="bg1"/>
+          </a:solidFill>
+          <a:ln w="25400">
+            <a:solidFill>
+              <a:schemeClr val="accent4"/>
+            </a:solidFill>
+          </a:ln>
+        </p:spPr>
+        <p:txBody>
+          <a:bodyPr wrap="square" lIns="38100" tIns="76200" rIns="76200" bIns="38100" rtlCol="0" anchor="ctr"/>
+          <a:lstStyle/>
+          <a:p>
+            <a:pPr indent="0" marL="0">
+              <a:buNone/>
+            </a:pPr>
+            <a:r>
+              <a:rPr lang="en-US" sz="1100" dirty="0">
+                <a:solidFill>
+                  <a:schemeClr val="tx1"/>
+                </a:solidFill>
+                <a:latin typeface="Raleway SemiBold" pitchFamily="34" charset="0"/>
+                <a:ea typeface="Raleway SemiBold" pitchFamily="34" charset="-122"/>
+                <a:cs typeface="Raleway SemiBold" pitchFamily="34" charset="-120"/>
+              </a:rPr>
+              <a:t>TO CONFIRM  </a:t>
+            </a:r>
+            <a:pPr indent="0" marL="0">
+              <a:buNone/>
+            </a:pPr>
+            <a:r>
+              <a:rPr lang="en-US" sz="1100" dirty="0">
+                <a:solidFill>
+                  <a:schemeClr val="tx1"/>
+                </a:solidFill>
+              </a:rPr>
+              <a:t>Wine 101 and My wines definitions, and which of them is built.</a:t>
+            </a:r>
+            <a:endParaRPr lang="en-US" sz="1100" dirty="0"/>
           </a:p>
         </p:txBody>
       </p:sp>

--- a/decks/Entre Amis - core brand story - DRAFT.pptx
+++ b/decks/Entre Amis - core brand story - DRAFT.pptx
@@ -121,12 +121,12 @@
   <p:extLst>
     <p:ext uri="{521415D9-36F7-43E2-AB2F-B90AF26B5E84}">
       <p14:sectionLst xmlns:p14="http://schemas.microsoft.com/office/powerpoint/2010/main">
-        <p14:section name="Introduction" id="{c3097012-aa5c-a7eb-39f5-91c82d98c9ca}">
+        <p14:section name="Introduction" id="{794e720c-7143-a52d-18c3-16ad5c37772c}">
           <p14:sldIdLst>
             <p14:sldId id="256"/>
           </p14:sldIdLst>
         </p14:section>
-        <p14:section name="The brand" id="{3dc37a04-47c1-3847-31bb-db3683c86d99}">
+        <p14:section name="The brand" id="{28789bc6-51b0-7654-b6a0-bbb09b2e59ee}">
           <p14:sldIdLst>
             <p14:sldId id="257"/>
             <p14:sldId id="258"/>
@@ -134,7 +134,7 @@
             <p14:sldId id="260"/>
           </p14:sldIdLst>
         </p14:section>
-        <p14:section name="What we're building" id="{b2cb11bb-9721-7b1d-2e0a-e0f721b1dc3d}">
+        <p14:section name="What we're building" id="{b9f07c08-7547-2bd4-3a55-b2c933ac96b4}">
           <p14:sldIdLst>
             <p14:sldId id="261"/>
             <p14:sldId id="262"/>
@@ -142,20 +142,20 @@
             <p14:sldId id="264"/>
           </p14:sldIdLst>
         </p14:section>
-        <p14:section name="About us" id="{49df7ad2-1192-239f-c029-6fd849f1da53}">
+        <p14:section name="About us" id="{05737ee6-cf8f-1e27-ae8c-4da14124c661}">
           <p14:sldIdLst>
             <p14:sldId id="265"/>
             <p14:sldId id="266"/>
           </p14:sldIdLst>
         </p14:section>
-        <p14:section name="Close" id="{675e23ed-b2af-ec28-1d0a-9823da4ed827}">
+        <p14:section name="Close" id="{ae967c99-21ff-c64c-09ab-f36cfa82c8ae}">
           <p14:sldIdLst>
             <p14:sldId id="267"/>
             <p14:sldId id="268"/>
             <p14:sldId id="269"/>
           </p14:sldIdLst>
         </p14:section>
-        <p14:section name="Working notes — delete before sharing" id="{2c5f07bf-f239-8a2d-e0b9-02bbb21facbd}">
+        <p14:section name="Working notes — delete before sharing" id="{b287b559-76ad-0edd-cc58-04422c15f47c}">
           <p14:sldIdLst>
             <p14:sldId id="270"/>
           </p14:sldIdLst>
@@ -11787,7 +11787,7 @@
                   <a:schemeClr val="tx1"/>
                 </a:solidFill>
               </a:rPr>
-              <a:t>Wine 101 and My wines definitions, and which of them is built.</a:t>
+              <a:t>Wine 101 and My wines definitions (proposed in the Brand Brain).</a:t>
             </a:r>
             <a:endParaRPr lang="en-US" sz="1100" dirty="0"/>
           </a:p>

--- a/decks/Entre Amis - core brand story - DRAFT.pptx
+++ b/decks/Entre Amis - core brand story - DRAFT.pptx
@@ -121,12 +121,12 @@
   <p:extLst>
     <p:ext uri="{521415D9-36F7-43E2-AB2F-B90AF26B5E84}">
       <p14:sectionLst xmlns:p14="http://schemas.microsoft.com/office/powerpoint/2010/main">
-        <p14:section name="Introduction" id="{794e720c-7143-a52d-18c3-16ad5c37772c}">
+        <p14:section name="Introduction" id="{ded45fbd-6661-51de-f260-4a5124d3c576}">
           <p14:sldIdLst>
             <p14:sldId id="256"/>
           </p14:sldIdLst>
         </p14:section>
-        <p14:section name="The brand" id="{28789bc6-51b0-7654-b6a0-bbb09b2e59ee}">
+        <p14:section name="The brand" id="{7c041968-97a0-bd52-3b90-6b5a412b8b7e}">
           <p14:sldIdLst>
             <p14:sldId id="257"/>
             <p14:sldId id="258"/>
@@ -134,7 +134,7 @@
             <p14:sldId id="260"/>
           </p14:sldIdLst>
         </p14:section>
-        <p14:section name="What we're building" id="{b9f07c08-7547-2bd4-3a55-b2c933ac96b4}">
+        <p14:section name="What we're building" id="{c0f4e9d4-b028-11fb-5743-c8bde44269d0}">
           <p14:sldIdLst>
             <p14:sldId id="261"/>
             <p14:sldId id="262"/>
@@ -142,20 +142,20 @@
             <p14:sldId id="264"/>
           </p14:sldIdLst>
         </p14:section>
-        <p14:section name="About us" id="{05737ee6-cf8f-1e27-ae8c-4da14124c661}">
+        <p14:section name="About us" id="{22c7ff74-3ed3-cfe4-d457-e00f1bc24d45}">
           <p14:sldIdLst>
             <p14:sldId id="265"/>
             <p14:sldId id="266"/>
           </p14:sldIdLst>
         </p14:section>
-        <p14:section name="Close" id="{ae967c99-21ff-c64c-09ab-f36cfa82c8ae}">
+        <p14:section name="Close" id="{ca8ad212-b8f0-ffbe-6c64-604dcbb934e2}">
           <p14:sldIdLst>
             <p14:sldId id="267"/>
             <p14:sldId id="268"/>
             <p14:sldId id="269"/>
           </p14:sldIdLst>
         </p14:section>
-        <p14:section name="Working notes — delete before sharing" id="{b287b559-76ad-0edd-cc58-04422c15f47c}">
+        <p14:section name="Working notes — delete before sharing" id="{604e02e4-c765-f02c-d1ce-403a60ab3edc}">
           <p14:sldIdLst>
             <p14:sldId id="270"/>
           </p14:sldIdLst>
@@ -2622,7 +2622,7 @@
                   <a:schemeClr val="tx1"/>
                 </a:solidFill>
               </a:rPr>
-              <a:t>The brand-wide consumer line. Talk. Laugh. Remember. is proposed as the game line (slide 7), so the cover uses supporting line 1 for now.</a:t>
+              <a:t>The brand-wide consumer line. Talk. Laugh. Remember. is the game line (slide 7), so the cover uses supporting line 1 for now.</a:t>
             </a:r>
             <a:endParaRPr lang="en-US" sz="1100" dirty="0"/>
           </a:p>
@@ -5584,42 +5584,6 @@
                   <a:schemeClr val="tx1"/>
                 </a:solidFill>
               </a:rPr>
-              <a:t>Talk. Laugh. Remember. as the game line (slide 7)</a:t>
-            </a:r>
-            <a:endParaRPr lang="en-US" sz="1500" dirty="0"/>
-          </a:p>
-          <a:p>
-            <a:pPr marL="203200" indent="-203200">
-              <a:spcAft>
-                <a:spcPts val="800"/>
-              </a:spcAft>
-              <a:buSzPct val="100000"/>
-              <a:buChar char="•"/>
-            </a:pPr>
-            <a:r>
-              <a:rPr lang="en-US" sz="1500" dirty="0">
-                <a:solidFill>
-                  <a:schemeClr val="tx1"/>
-                </a:solidFill>
-              </a:rPr>
-              <a:t>Journey, Partner Mode and Event Mode, observations rule, Wine 101 and My wines: confirm in the Brand Brain</a:t>
-            </a:r>
-            <a:endParaRPr lang="en-US" sz="1500" dirty="0"/>
-          </a:p>
-          <a:p>
-            <a:pPr marL="203200" indent="-203200">
-              <a:spcAft>
-                <a:spcPts val="800"/>
-              </a:spcAft>
-              <a:buSzPct val="100000"/>
-              <a:buChar char="•"/>
-            </a:pPr>
-            <a:r>
-              <a:rPr lang="en-US" sz="1500" dirty="0">
-                <a:solidFill>
-                  <a:schemeClr val="tx1"/>
-                </a:solidFill>
-              </a:rPr>
               <a:t>Event Mode's stage and product differences (slides 6, 9)</a:t>
             </a:r>
             <a:endParaRPr lang="en-US" sz="1500" dirty="0"/>
@@ -6560,62 +6524,6 @@
       </p:sp>
       <p:sp>
         <p:nvSpPr>
-          <p:cNvPr id="13" name="FLAG — delete before sharing"/>
-          <p:cNvSpPr txBox="1"/>
-          <p:nvPr/>
-        </p:nvSpPr>
-        <p:spPr>
-          <a:xfrm>
-            <a:off x="548640" y="5532120"/>
-            <a:ext cx="6766560" cy="457200"/>
-          </a:xfrm>
-          <a:prstGeom prst="rect">
-            <a:avLst/>
-          </a:prstGeom>
-          <a:solidFill>
-            <a:schemeClr val="bg1"/>
-          </a:solidFill>
-          <a:ln w="25400">
-            <a:solidFill>
-              <a:schemeClr val="accent4"/>
-            </a:solidFill>
-          </a:ln>
-        </p:spPr>
-        <p:txBody>
-          <a:bodyPr wrap="square" lIns="38100" tIns="76200" rIns="76200" bIns="38100" rtlCol="0" anchor="ctr"/>
-          <a:lstStyle/>
-          <a:p>
-            <a:pPr indent="0" marL="0">
-              <a:buNone/>
-            </a:pPr>
-            <a:r>
-              <a:rPr lang="en-US" sz="1100" dirty="0">
-                <a:solidFill>
-                  <a:schemeClr val="tx1"/>
-                </a:solidFill>
-                <a:latin typeface="Raleway SemiBold" pitchFamily="34" charset="0"/>
-                <a:ea typeface="Raleway SemiBold" pitchFamily="34" charset="-122"/>
-                <a:cs typeface="Raleway SemiBold" pitchFamily="34" charset="-120"/>
-              </a:rPr>
-              <a:t>TO CONFIRM  </a:t>
-            </a:r>
-            <a:pPr indent="0" marL="0">
-              <a:buNone/>
-            </a:pPr>
-            <a:r>
-              <a:rPr lang="en-US" sz="1100" dirty="0">
-                <a:solidFill>
-                  <a:schemeClr val="tx1"/>
-                </a:solidFill>
-              </a:rPr>
-              <a:t>Showing heard-but-unattributed lines as observations is proposed in the Brand Brain.</a:t>
-            </a:r>
-            <a:endParaRPr lang="en-US" sz="1100" dirty="0"/>
-          </a:p>
-        </p:txBody>
-      </p:sp>
-      <p:sp>
-        <p:nvSpPr>
           <p:cNvPr id="25" name="Slide Number Placeholder 0"/>
           <p:cNvSpPr>
             <a:spLocks noGrp="1"/>
@@ -8906,63 +8814,7 @@
       </p:sp>
       <p:sp>
         <p:nvSpPr>
-          <p:cNvPr id="11" name="FLAG — delete before sharing"/>
-          <p:cNvSpPr txBox="1"/>
-          <p:nvPr/>
-        </p:nvSpPr>
-        <p:spPr>
-          <a:xfrm>
-            <a:off x="9326880" y="1783080"/>
-            <a:ext cx="2316175" cy="548640"/>
-          </a:xfrm>
-          <a:prstGeom prst="rect">
-            <a:avLst/>
-          </a:prstGeom>
-          <a:solidFill>
-            <a:schemeClr val="bg1"/>
-          </a:solidFill>
-          <a:ln w="25400">
-            <a:solidFill>
-              <a:schemeClr val="accent4"/>
-            </a:solidFill>
-          </a:ln>
-        </p:spPr>
-        <p:txBody>
-          <a:bodyPr wrap="square" lIns="38100" tIns="76200" rIns="76200" bIns="38100" rtlCol="0" anchor="ctr"/>
-          <a:lstStyle/>
-          <a:p>
-            <a:pPr indent="0" marL="0">
-              <a:buNone/>
-            </a:pPr>
-            <a:r>
-              <a:rPr lang="en-US" sz="1100" dirty="0">
-                <a:solidFill>
-                  <a:schemeClr val="tx1"/>
-                </a:solidFill>
-                <a:latin typeface="Raleway SemiBold" pitchFamily="34" charset="0"/>
-                <a:ea typeface="Raleway SemiBold" pitchFamily="34" charset="-122"/>
-                <a:cs typeface="Raleway SemiBold" pitchFamily="34" charset="-120"/>
-              </a:rPr>
-              <a:t>TO CONFIRM  </a:t>
-            </a:r>
-            <a:pPr indent="0" marL="0">
-              <a:buNone/>
-            </a:pPr>
-            <a:r>
-              <a:rPr lang="en-US" sz="1100" dirty="0">
-                <a:solidFill>
-                  <a:schemeClr val="tx1"/>
-                </a:solidFill>
-              </a:rPr>
-              <a:t>Journey proposed in the Brand Brain.</a:t>
-            </a:r>
-            <a:endParaRPr lang="en-US" sz="1100" dirty="0"/>
-          </a:p>
-        </p:txBody>
-      </p:sp>
-      <p:sp>
-        <p:nvSpPr>
-          <p:cNvPr id="12" name="Offer: THE GAME"/>
+          <p:cNvPr id="11" name="Offer: THE GAME"/>
           <p:cNvSpPr/>
           <p:nvPr/>
         </p:nvSpPr>
@@ -8996,7 +8848,7 @@
       </p:sp>
       <p:sp>
         <p:nvSpPr>
-          <p:cNvPr id="13" name="Expression marker: THE GAME"/>
+          <p:cNvPr id="12" name="Expression marker: THE GAME"/>
           <p:cNvSpPr txBox="1"/>
           <p:nvPr/>
         </p:nvSpPr>
@@ -9039,7 +8891,7 @@
       </p:sp>
       <p:sp>
         <p:nvSpPr>
-          <p:cNvPr id="14" name="Text 12"/>
+          <p:cNvPr id="13" name="Text 11"/>
           <p:cNvSpPr txBox="1"/>
           <p:nvPr/>
         </p:nvSpPr>
@@ -9078,7 +8930,7 @@
       </p:sp>
       <p:sp>
         <p:nvSpPr>
-          <p:cNvPr id="15" name="Stage tag"/>
+          <p:cNvPr id="14" name="Stage tag"/>
           <p:cNvSpPr txBox="1"/>
           <p:nvPr/>
         </p:nvSpPr>
@@ -9125,7 +8977,7 @@
       </p:sp>
       <p:sp>
         <p:nvSpPr>
-          <p:cNvPr id="16" name="Offer: THE APP"/>
+          <p:cNvPr id="15" name="Offer: THE APP"/>
           <p:cNvSpPr/>
           <p:nvPr/>
         </p:nvSpPr>
@@ -9159,7 +9011,7 @@
       </p:sp>
       <p:sp>
         <p:nvSpPr>
-          <p:cNvPr id="17" name="Expression marker: THE APP"/>
+          <p:cNvPr id="16" name="Expression marker: THE APP"/>
           <p:cNvSpPr txBox="1"/>
           <p:nvPr/>
         </p:nvSpPr>
@@ -9202,7 +9054,7 @@
       </p:sp>
       <p:sp>
         <p:nvSpPr>
-          <p:cNvPr id="18" name="Text 16"/>
+          <p:cNvPr id="17" name="Text 15"/>
           <p:cNvSpPr txBox="1"/>
           <p:nvPr/>
         </p:nvSpPr>
@@ -9241,7 +9093,7 @@
       </p:sp>
       <p:sp>
         <p:nvSpPr>
-          <p:cNvPr id="19" name="Stage tag"/>
+          <p:cNvPr id="18" name="Stage tag"/>
           <p:cNvSpPr txBox="1"/>
           <p:nvPr/>
         </p:nvSpPr>
@@ -9288,7 +9140,7 @@
       </p:sp>
       <p:sp>
         <p:nvSpPr>
-          <p:cNvPr id="20" name="Offer: ENTRE AMIS STAYS"/>
+          <p:cNvPr id="19" name="Offer: ENTRE AMIS STAYS"/>
           <p:cNvSpPr/>
           <p:nvPr/>
         </p:nvSpPr>
@@ -9322,7 +9174,7 @@
       </p:sp>
       <p:sp>
         <p:nvSpPr>
-          <p:cNvPr id="21" name="Expression marker: ENTRE AMIS STAYS"/>
+          <p:cNvPr id="20" name="Expression marker: ENTRE AMIS STAYS"/>
           <p:cNvSpPr txBox="1"/>
           <p:nvPr/>
         </p:nvSpPr>
@@ -9365,7 +9217,7 @@
       </p:sp>
       <p:sp>
         <p:nvSpPr>
-          <p:cNvPr id="22" name="Text 20"/>
+          <p:cNvPr id="21" name="Text 19"/>
           <p:cNvSpPr txBox="1"/>
           <p:nvPr/>
         </p:nvSpPr>
@@ -9404,7 +9256,7 @@
       </p:sp>
       <p:sp>
         <p:nvSpPr>
-          <p:cNvPr id="23" name="Stage tag"/>
+          <p:cNvPr id="22" name="Stage tag"/>
           <p:cNvSpPr txBox="1"/>
           <p:nvPr/>
         </p:nvSpPr>
@@ -9451,7 +9303,7 @@
       </p:sp>
       <p:sp>
         <p:nvSpPr>
-          <p:cNvPr id="24" name="Offer: WITH PARTNERS"/>
+          <p:cNvPr id="23" name="Offer: WITH PARTNERS"/>
           <p:cNvSpPr/>
           <p:nvPr/>
         </p:nvSpPr>
@@ -9485,7 +9337,7 @@
       </p:sp>
       <p:sp>
         <p:nvSpPr>
-          <p:cNvPr id="25" name="Expression marker: WITH PARTNERS"/>
+          <p:cNvPr id="24" name="Expression marker: WITH PARTNERS"/>
           <p:cNvSpPr txBox="1"/>
           <p:nvPr/>
         </p:nvSpPr>
@@ -9528,7 +9380,7 @@
       </p:sp>
       <p:sp>
         <p:nvSpPr>
-          <p:cNvPr id="26" name="Text 24"/>
+          <p:cNvPr id="25" name="Text 23"/>
           <p:cNvSpPr txBox="1"/>
           <p:nvPr/>
         </p:nvSpPr>
@@ -9567,7 +9419,7 @@
       </p:sp>
       <p:sp>
         <p:nvSpPr>
-          <p:cNvPr id="27" name="Stage tag"/>
+          <p:cNvPr id="26" name="Stage tag"/>
           <p:cNvSpPr txBox="1"/>
           <p:nvPr/>
         </p:nvSpPr>
@@ -9614,7 +9466,7 @@
       </p:sp>
       <p:sp>
         <p:nvSpPr>
-          <p:cNvPr id="28" name="FLAG — delete before sharing"/>
+          <p:cNvPr id="27" name="FLAG — delete before sharing"/>
           <p:cNvSpPr txBox="1"/>
           <p:nvPr/>
         </p:nvSpPr>
@@ -9670,7 +9522,7 @@
       </p:sp>
       <p:sp>
         <p:nvSpPr>
-          <p:cNvPr id="29" name="FLAG — delete before sharing"/>
+          <p:cNvPr id="28" name="FLAG — delete before sharing"/>
           <p:cNvSpPr txBox="1"/>
           <p:nvPr/>
         </p:nvSpPr>
@@ -11058,62 +10910,6 @@
       </p:sp>
       <p:sp>
         <p:nvSpPr>
-          <p:cNvPr id="31" name="FLAG — delete before sharing"/>
-          <p:cNvSpPr txBox="1"/>
-          <p:nvPr/>
-        </p:nvSpPr>
-        <p:spPr>
-          <a:xfrm>
-            <a:off x="548640" y="5760720"/>
-            <a:ext cx="4206240" cy="347472"/>
-          </a:xfrm>
-          <a:prstGeom prst="rect">
-            <a:avLst/>
-          </a:prstGeom>
-          <a:solidFill>
-            <a:schemeClr val="bg1"/>
-          </a:solidFill>
-          <a:ln w="25400">
-            <a:solidFill>
-              <a:schemeClr val="accent4"/>
-            </a:solidFill>
-          </a:ln>
-        </p:spPr>
-        <p:txBody>
-          <a:bodyPr wrap="square" lIns="38100" tIns="76200" rIns="76200" bIns="38100" rtlCol="0" anchor="ctr"/>
-          <a:lstStyle/>
-          <a:p>
-            <a:pPr indent="0" marL="0">
-              <a:buNone/>
-            </a:pPr>
-            <a:r>
-              <a:rPr lang="en-US" sz="1000" dirty="0">
-                <a:solidFill>
-                  <a:schemeClr val="tx1"/>
-                </a:solidFill>
-                <a:latin typeface="Raleway SemiBold" pitchFamily="34" charset="0"/>
-                <a:ea typeface="Raleway SemiBold" pitchFamily="34" charset="-122"/>
-                <a:cs typeface="Raleway SemiBold" pitchFamily="34" charset="-120"/>
-              </a:rPr>
-              <a:t>TO CONFIRM  </a:t>
-            </a:r>
-            <a:pPr indent="0" marL="0">
-              <a:buNone/>
-            </a:pPr>
-            <a:r>
-              <a:rPr lang="en-US" sz="1000" dirty="0">
-                <a:solidFill>
-                  <a:schemeClr val="tx1"/>
-                </a:solidFill>
-              </a:rPr>
-              <a:t>Talk. Laugh. Remember. as the game line (proposed).</a:t>
-            </a:r>
-            <a:endParaRPr lang="en-US" sz="1000" dirty="0"/>
-          </a:p>
-        </p:txBody>
-      </p:sp>
-      <p:sp>
-        <p:nvSpPr>
           <p:cNvPr id="25" name="Slide Number Placeholder 0"/>
           <p:cNvSpPr>
             <a:spLocks noGrp="1"/>
@@ -11739,62 +11535,6 @@
       </p:sp>
       <p:sp>
         <p:nvSpPr>
-          <p:cNvPr id="13" name="FLAG — delete before sharing"/>
-          <p:cNvSpPr txBox="1"/>
-          <p:nvPr/>
-        </p:nvSpPr>
-        <p:spPr>
-          <a:xfrm>
-            <a:off x="6903720" y="5440680"/>
-            <a:ext cx="4739335" cy="594360"/>
-          </a:xfrm>
-          <a:prstGeom prst="rect">
-            <a:avLst/>
-          </a:prstGeom>
-          <a:solidFill>
-            <a:schemeClr val="bg1"/>
-          </a:solidFill>
-          <a:ln w="25400">
-            <a:solidFill>
-              <a:schemeClr val="accent4"/>
-            </a:solidFill>
-          </a:ln>
-        </p:spPr>
-        <p:txBody>
-          <a:bodyPr wrap="square" lIns="38100" tIns="76200" rIns="76200" bIns="38100" rtlCol="0" anchor="ctr"/>
-          <a:lstStyle/>
-          <a:p>
-            <a:pPr indent="0" marL="0">
-              <a:buNone/>
-            </a:pPr>
-            <a:r>
-              <a:rPr lang="en-US" sz="1100" dirty="0">
-                <a:solidFill>
-                  <a:schemeClr val="tx1"/>
-                </a:solidFill>
-                <a:latin typeface="Raleway SemiBold" pitchFamily="34" charset="0"/>
-                <a:ea typeface="Raleway SemiBold" pitchFamily="34" charset="-122"/>
-                <a:cs typeface="Raleway SemiBold" pitchFamily="34" charset="-120"/>
-              </a:rPr>
-              <a:t>TO CONFIRM  </a:t>
-            </a:r>
-            <a:pPr indent="0" marL="0">
-              <a:buNone/>
-            </a:pPr>
-            <a:r>
-              <a:rPr lang="en-US" sz="1100" dirty="0">
-                <a:solidFill>
-                  <a:schemeClr val="tx1"/>
-                </a:solidFill>
-              </a:rPr>
-              <a:t>Wine 101 and My wines definitions (proposed in the Brand Brain).</a:t>
-            </a:r>
-            <a:endParaRPr lang="en-US" sz="1100" dirty="0"/>
-          </a:p>
-        </p:txBody>
-      </p:sp>
-      <p:sp>
-        <p:nvSpPr>
           <p:cNvPr id="25" name="Slide Number Placeholder 0"/>
           <p:cNvSpPr>
             <a:spLocks noGrp="1"/>
@@ -12647,8 +12387,8 @@
         </p:nvSpPr>
         <p:spPr>
           <a:xfrm>
-            <a:off x="8686800" y="4572000"/>
-            <a:ext cx="2956255" cy="621792"/>
+            <a:off x="8686800" y="5257800"/>
+            <a:ext cx="2956255" cy="640080"/>
           </a:xfrm>
           <a:prstGeom prst="rect">
             <a:avLst/>
@@ -12678,7 +12418,7 @@
                 <a:ea typeface="Raleway SemiBold" pitchFamily="34" charset="-122"/>
                 <a:cs typeface="Raleway SemiBold" pitchFamily="34" charset="-120"/>
               </a:rPr>
-              <a:t>TO CONFIRM  </a:t>
+              <a:t>TO DECIDE  </a:t>
             </a:r>
             <a:pPr indent="0" marL="0">
               <a:buNone/>
@@ -12689,7 +12429,7 @@
                   <a:schemeClr val="tx1"/>
                 </a:solidFill>
               </a:rPr>
-              <a:t>Partner Mode and Event Mode are proposed in the Brand Brain.</a:t>
+              <a:t>Event Mode's stage, and how it differs from Partner Mode.</a:t>
             </a:r>
             <a:endParaRPr lang="en-US" sz="1100" dirty="0"/>
           </a:p>
@@ -12697,63 +12437,7 @@
       </p:sp>
       <p:sp>
         <p:nvSpPr>
-          <p:cNvPr id="17" name="FLAG — delete before sharing"/>
-          <p:cNvSpPr txBox="1"/>
-          <p:nvPr/>
-        </p:nvSpPr>
-        <p:spPr>
-          <a:xfrm>
-            <a:off x="8686800" y="5257800"/>
-            <a:ext cx="2956255" cy="640080"/>
-          </a:xfrm>
-          <a:prstGeom prst="rect">
-            <a:avLst/>
-          </a:prstGeom>
-          <a:solidFill>
-            <a:schemeClr val="bg1"/>
-          </a:solidFill>
-          <a:ln w="25400">
-            <a:solidFill>
-              <a:schemeClr val="accent4"/>
-            </a:solidFill>
-          </a:ln>
-        </p:spPr>
-        <p:txBody>
-          <a:bodyPr wrap="square" lIns="38100" tIns="76200" rIns="76200" bIns="38100" rtlCol="0" anchor="ctr"/>
-          <a:lstStyle/>
-          <a:p>
-            <a:pPr indent="0" marL="0">
-              <a:buNone/>
-            </a:pPr>
-            <a:r>
-              <a:rPr lang="en-US" sz="1100" dirty="0">
-                <a:solidFill>
-                  <a:schemeClr val="tx1"/>
-                </a:solidFill>
-                <a:latin typeface="Raleway SemiBold" pitchFamily="34" charset="0"/>
-                <a:ea typeface="Raleway SemiBold" pitchFamily="34" charset="-122"/>
-                <a:cs typeface="Raleway SemiBold" pitchFamily="34" charset="-120"/>
-              </a:rPr>
-              <a:t>TO DECIDE  </a:t>
-            </a:r>
-            <a:pPr indent="0" marL="0">
-              <a:buNone/>
-            </a:pPr>
-            <a:r>
-              <a:rPr lang="en-US" sz="1100" dirty="0">
-                <a:solidFill>
-                  <a:schemeClr val="tx1"/>
-                </a:solidFill>
-              </a:rPr>
-              <a:t>Event Mode's stage, and how it differs from Partner Mode.</a:t>
-            </a:r>
-            <a:endParaRPr lang="en-US" sz="1100" dirty="0"/>
-          </a:p>
-        </p:txBody>
-      </p:sp>
-      <p:sp>
-        <p:nvSpPr>
-          <p:cNvPr id="19" name="Text 1"/>
+          <p:cNvPr id="18" name="Text 1"/>
           <p:cNvSpPr/>
           <p:nvPr>
             <p:ph idx="103" type="body" hasCustomPrompt="1"/>

--- a/decks/Entre Amis - core brand story - DRAFT.pptx
+++ b/decks/Entre Amis - core brand story - DRAFT.pptx
@@ -121,12 +121,12 @@
   <p:extLst>
     <p:ext uri="{521415D9-36F7-43E2-AB2F-B90AF26B5E84}">
       <p14:sectionLst xmlns:p14="http://schemas.microsoft.com/office/powerpoint/2010/main">
-        <p14:section name="Introduction" id="{ded45fbd-6661-51de-f260-4a5124d3c576}">
+        <p14:section name="Introduction" id="{f969a549-72f8-8ba2-f449-c055d6470c77}">
           <p14:sldIdLst>
             <p14:sldId id="256"/>
           </p14:sldIdLst>
         </p14:section>
-        <p14:section name="The brand" id="{7c041968-97a0-bd52-3b90-6b5a412b8b7e}">
+        <p14:section name="The brand" id="{3859bd93-49a7-c44e-74ff-7c804b0a8f07}">
           <p14:sldIdLst>
             <p14:sldId id="257"/>
             <p14:sldId id="258"/>
@@ -134,7 +134,7 @@
             <p14:sldId id="260"/>
           </p14:sldIdLst>
         </p14:section>
-        <p14:section name="What we're building" id="{c0f4e9d4-b028-11fb-5743-c8bde44269d0}">
+        <p14:section name="What we're building" id="{985c97e4-b0cb-b724-59c9-4238b1746004}">
           <p14:sldIdLst>
             <p14:sldId id="261"/>
             <p14:sldId id="262"/>
@@ -142,20 +142,20 @@
             <p14:sldId id="264"/>
           </p14:sldIdLst>
         </p14:section>
-        <p14:section name="About us" id="{22c7ff74-3ed3-cfe4-d457-e00f1bc24d45}">
+        <p14:section name="About us" id="{f9b3e35a-06f3-9b22-823c-ea1b867610bc}">
           <p14:sldIdLst>
             <p14:sldId id="265"/>
             <p14:sldId id="266"/>
           </p14:sldIdLst>
         </p14:section>
-        <p14:section name="Close" id="{ca8ad212-b8f0-ffbe-6c64-604dcbb934e2}">
+        <p14:section name="Close" id="{0cbfc9ef-3a73-8959-206c-e17001d670ff}">
           <p14:sldIdLst>
             <p14:sldId id="267"/>
             <p14:sldId id="268"/>
             <p14:sldId id="269"/>
           </p14:sldIdLst>
         </p14:section>
-        <p14:section name="Working notes — delete before sharing" id="{604e02e4-c765-f02c-d1ce-403a60ab3edc}">
+        <p14:section name="Working notes — delete before sharing" id="{2e4e6eef-b274-75e0-4ae1-b7bc0b5794ec}">
           <p14:sldIdLst>
             <p14:sldId id="270"/>
           </p14:sldIdLst>
@@ -1710,7 +1710,7 @@
           <a:p>
             <a:r>
               <a:rPr lang="en-US" dirty="0"/>
-              <a:t>Wine recognition is deliberately left out: it isn't claimable until it's built into the app. Wine 101 and My wines follow the founder's correction (12 October): Wine 101 is a directory of wine facts; My wines is the personal record. Add app screens.</a:t>
+              <a:t>Updated 16 October to the confirmed feature status: photographing a label, My wines on any device, questions about the wine in the glass and Just tasting are now claimable as in development. Never name the supplier behind the label photo, and never claim it knows every wine. Wine 101 and My wines follow the founder's correction (12 October): Wine 101 is a directory of wine facts; My wines is the personal record. Add app screens.</a:t>
             </a:r>
             <a:endParaRPr lang="en-US" dirty="0"/>
           </a:p>
@@ -5584,7 +5584,7 @@
                   <a:schemeClr val="tx1"/>
                 </a:solidFill>
               </a:rPr>
-              <a:t>Event Mode's stage and product differences (slides 6, 9)</a:t>
+              <a:t>How Event Mode differs from Partner Mode (slide 9)</a:t>
             </a:r>
             <a:endParaRPr lang="en-US" sz="1500" dirty="0"/>
           </a:p>
@@ -9522,62 +9522,6 @@
       </p:sp>
       <p:sp>
         <p:nvSpPr>
-          <p:cNvPr id="28" name="FLAG — delete before sharing"/>
-          <p:cNvSpPr txBox="1"/>
-          <p:nvPr/>
-        </p:nvSpPr>
-        <p:spPr>
-          <a:xfrm>
-            <a:off x="9075191" y="5532120"/>
-            <a:ext cx="2567864" cy="548640"/>
-          </a:xfrm>
-          <a:prstGeom prst="rect">
-            <a:avLst/>
-          </a:prstGeom>
-          <a:solidFill>
-            <a:schemeClr val="bg1"/>
-          </a:solidFill>
-          <a:ln w="25400">
-            <a:solidFill>
-              <a:schemeClr val="accent4"/>
-            </a:solidFill>
-          </a:ln>
-        </p:spPr>
-        <p:txBody>
-          <a:bodyPr wrap="square" lIns="38100" tIns="76200" rIns="76200" bIns="38100" rtlCol="0" anchor="ctr"/>
-          <a:lstStyle/>
-          <a:p>
-            <a:pPr indent="0" marL="0">
-              <a:buNone/>
-            </a:pPr>
-            <a:r>
-              <a:rPr lang="en-US" sz="1000" dirty="0">
-                <a:solidFill>
-                  <a:schemeClr val="tx1"/>
-                </a:solidFill>
-                <a:latin typeface="Raleway SemiBold" pitchFamily="34" charset="0"/>
-                <a:ea typeface="Raleway SemiBold" pitchFamily="34" charset="-122"/>
-                <a:cs typeface="Raleway SemiBold" pitchFamily="34" charset="-120"/>
-              </a:rPr>
-              <a:t>TO DECIDE  </a:t>
-            </a:r>
-            <a:pPr indent="0" marL="0">
-              <a:buNone/>
-            </a:pPr>
-            <a:r>
-              <a:rPr lang="en-US" sz="1000" dirty="0">
-                <a:solidFill>
-                  <a:schemeClr val="tx1"/>
-                </a:solidFill>
-              </a:rPr>
-              <a:t>Event Mode's stage. Until then, say Partner Mode only.</a:t>
-            </a:r>
-            <a:endParaRPr lang="en-US" sz="1000" dirty="0"/>
-          </a:p>
-        </p:txBody>
-      </p:sp>
-      <p:sp>
-        <p:nvSpPr>
           <p:cNvPr id="25" name="Slide Number Placeholder 0"/>
           <p:cNvSpPr>
             <a:spLocks noGrp="1"/>
@@ -11196,7 +11140,7 @@
         <p:spPr>
           <a:xfrm>
             <a:off x="868680" y="2011680"/>
-            <a:ext cx="5394960" cy="3429000"/>
+            <a:ext cx="5394960" cy="3474720"/>
           </a:xfrm>
           <a:prstGeom prst="rect">
             <a:avLst/>
@@ -11210,146 +11154,164 @@
           <a:p>
             <a:pPr marL="203200" indent="-203200">
               <a:spcAft>
-                <a:spcPts val="700"/>
+                <a:spcPts val="500"/>
               </a:spcAft>
               <a:buSzPct val="100000"/>
               <a:buChar char="•"/>
             </a:pPr>
             <a:r>
-              <a:rPr lang="en-US" sz="1600" dirty="0">
+              <a:rPr lang="en-US" sz="1500" dirty="0">
                 <a:solidFill>
                   <a:schemeClr val="tx1"/>
                 </a:solidFill>
               </a:rPr>
               <a:t>Hosts and Guests play together.</a:t>
             </a:r>
-            <a:endParaRPr lang="en-US" sz="1600" dirty="0"/>
+            <a:endParaRPr lang="en-US" sz="1500" dirty="0"/>
           </a:p>
           <a:p>
             <a:pPr marL="203200" indent="-203200">
               <a:spcAft>
-                <a:spcPts val="700"/>
+                <a:spcPts val="500"/>
               </a:spcAft>
               <a:buSzPct val="100000"/>
               <a:buChar char="•"/>
             </a:pPr>
             <a:r>
-              <a:rPr lang="en-US" sz="1600" dirty="0">
+              <a:rPr lang="en-US" sz="1500" dirty="0">
                 <a:solidFill>
                   <a:schemeClr val="tx1"/>
                 </a:solidFill>
               </a:rPr>
               <a:t>Runs the game, including a digital spinner.</a:t>
             </a:r>
-            <a:endParaRPr lang="en-US" sz="1600" dirty="0"/>
+            <a:endParaRPr lang="en-US" sz="1500" dirty="0"/>
           </a:p>
           <a:p>
             <a:pPr marL="203200" indent="-203200">
               <a:spcAft>
-                <a:spcPts val="700"/>
+                <a:spcPts val="500"/>
               </a:spcAft>
               <a:buSzPct val="100000"/>
               <a:buChar char="•"/>
             </a:pPr>
             <a:r>
-              <a:rPr lang="en-US" sz="1600" dirty="0">
-                <a:solidFill>
-                  <a:schemeClr val="tx1"/>
-                </a:solidFill>
-              </a:rPr>
-              <a:t>Plain-English hints when curiosity appears.</a:t>
-            </a:r>
-            <a:endParaRPr lang="en-US" sz="1600" dirty="0"/>
+              <a:rPr lang="en-US" sz="1500" dirty="0">
+                <a:solidFill>
+                  <a:schemeClr val="tx1"/>
+                </a:solidFill>
+              </a:rPr>
+              <a:t>Photograph a label to add a wine and its details.</a:t>
+            </a:r>
+            <a:endParaRPr lang="en-US" sz="1500" dirty="0"/>
           </a:p>
           <a:p>
             <a:pPr marL="203200" indent="-203200">
               <a:spcAft>
-                <a:spcPts val="700"/>
+                <a:spcPts val="500"/>
               </a:spcAft>
               <a:buSzPct val="100000"/>
               <a:buChar char="•"/>
             </a:pPr>
             <a:r>
-              <a:rPr lang="en-US" sz="1600" dirty="0">
-                <a:solidFill>
-                  <a:schemeClr val="tx1"/>
-                </a:solidFill>
-              </a:rPr>
-              <a:t>Saves the occasion and the scores.</a:t>
-            </a:r>
-            <a:endParaRPr lang="en-US" sz="1600" dirty="0"/>
+              <a:rPr lang="en-US" sz="1500" dirty="0">
+                <a:solidFill>
+                  <a:schemeClr val="tx1"/>
+                </a:solidFill>
+              </a:rPr>
+              <a:t>Plain-English hints when curiosity appears.</a:t>
+            </a:r>
+            <a:endParaRPr lang="en-US" sz="1500" dirty="0"/>
           </a:p>
           <a:p>
             <a:pPr marL="203200" indent="-203200">
               <a:spcAft>
-                <a:spcPts val="700"/>
+                <a:spcPts val="500"/>
               </a:spcAft>
               <a:buSzPct val="100000"/>
               <a:buChar char="•"/>
             </a:pPr>
             <a:r>
-              <a:rPr lang="en-US" sz="1600" dirty="0">
-                <a:solidFill>
-                  <a:schemeClr val="tx1"/>
-                </a:solidFill>
-              </a:rPr>
-              <a:t>Wine 101: wine facts and help, like a directory.</a:t>
-            </a:r>
-            <a:endParaRPr lang="en-US" sz="1600" dirty="0"/>
+              <a:rPr lang="en-US" sz="1500" dirty="0">
+                <a:solidFill>
+                  <a:schemeClr val="tx1"/>
+                </a:solidFill>
+              </a:rPr>
+              <a:t>Saves the occasion and the scores.</a:t>
+            </a:r>
+            <a:endParaRPr lang="en-US" sz="1500" dirty="0"/>
           </a:p>
           <a:p>
             <a:pPr marL="203200" indent="-203200">
               <a:spcAft>
-                <a:spcPts val="700"/>
+                <a:spcPts val="500"/>
               </a:spcAft>
               <a:buSzPct val="100000"/>
               <a:buChar char="•"/>
             </a:pPr>
             <a:r>
-              <a:rPr lang="en-US" sz="1600" dirty="0">
-                <a:solidFill>
-                  <a:schemeClr val="tx1"/>
-                </a:solidFill>
-              </a:rPr>
-              <a:t>My wines: your tastings, favourites, events and experiences.</a:t>
-            </a:r>
-            <a:endParaRPr lang="en-US" sz="1600" dirty="0"/>
+              <a:rPr lang="en-US" sz="1500" dirty="0">
+                <a:solidFill>
+                  <a:schemeClr val="tx1"/>
+                </a:solidFill>
+              </a:rPr>
+              <a:t>Wine 101: wine facts and help, like a directory.</a:t>
+            </a:r>
+            <a:endParaRPr lang="en-US" sz="1500" dirty="0"/>
           </a:p>
           <a:p>
             <a:pPr marL="203200" indent="-203200">
               <a:spcAft>
-                <a:spcPts val="700"/>
+                <a:spcPts val="500"/>
               </a:spcAft>
               <a:buSzPct val="100000"/>
               <a:buChar char="•"/>
             </a:pPr>
             <a:r>
-              <a:rPr lang="en-US" sz="1600" dirty="0">
-                <a:solidFill>
-                  <a:schemeClr val="tx1"/>
-                </a:solidFill>
-              </a:rPr>
-              <a:t>Optional Word Play and Wine Knowledge levels.</a:t>
-            </a:r>
-            <a:endParaRPr lang="en-US" sz="1600" dirty="0"/>
+              <a:rPr lang="en-US" sz="1500" dirty="0">
+                <a:solidFill>
+                  <a:schemeClr val="tx1"/>
+                </a:solidFill>
+              </a:rPr>
+              <a:t>My wines: your tastings, favourites, events and experiences, on any device.</a:t>
+            </a:r>
+            <a:endParaRPr lang="en-US" sz="1500" dirty="0"/>
           </a:p>
           <a:p>
             <a:pPr marL="203200" indent="-203200">
               <a:spcAft>
-                <a:spcPts val="700"/>
+                <a:spcPts val="500"/>
               </a:spcAft>
               <a:buSzPct val="100000"/>
               <a:buChar char="•"/>
             </a:pPr>
             <a:r>
-              <a:rPr lang="en-US" sz="1600" dirty="0">
-                <a:solidFill>
-                  <a:schemeClr val="tx1"/>
-                </a:solidFill>
-              </a:rPr>
-              <a:t>Hosts can also use it for their own tasting.</a:t>
-            </a:r>
-            <a:endParaRPr lang="en-US" sz="1600" dirty="0"/>
+              <a:rPr lang="en-US" sz="1500" dirty="0">
+                <a:solidFill>
+                  <a:schemeClr val="tx1"/>
+                </a:solidFill>
+              </a:rPr>
+              <a:t>Optional Word Play and Wine Knowledge, with questions about the wine in your glass.</a:t>
+            </a:r>
+            <a:endParaRPr lang="en-US" sz="1500" dirty="0"/>
+          </a:p>
+          <a:p>
+            <a:pPr marL="203200" indent="-203200">
+              <a:spcAft>
+                <a:spcPts val="500"/>
+              </a:spcAft>
+              <a:buSzPct val="100000"/>
+              <a:buChar char="•"/>
+            </a:pPr>
+            <a:r>
+              <a:rPr lang="en-US" sz="1500" dirty="0">
+                <a:solidFill>
+                  <a:schemeClr val="tx1"/>
+                </a:solidFill>
+              </a:rPr>
+              <a:t>Just tasting: guided questions when you taste on your own.</a:t>
+            </a:r>
+            <a:endParaRPr lang="en-US" sz="1500" dirty="0"/>
           </a:p>
         </p:txBody>
       </p:sp>
@@ -12429,7 +12391,7 @@
                   <a:schemeClr val="tx1"/>
                 </a:solidFill>
               </a:rPr>
-              <a:t>Event Mode's stage, and how it differs from Partner Mode.</a:t>
+              <a:t>How Event Mode differs from Partner Mode, in detail.</a:t>
             </a:r>
             <a:endParaRPr lang="en-US" sz="1100" dirty="0"/>
           </a:p>
